--- a/slides/CSC336-Lecture-02-Tiered-Web-Architecture.pptx
+++ b/slides/CSC336-Lecture-02-Tiered-Web-Architecture.pptx
@@ -5304,7 +5304,7 @@
         <p:spPr>
           <a:xfrm>
             <a:off x="640080" y="4800600"/>
-            <a:ext cx="10911535" cy="1097280"/>
+            <a:ext cx="10911535" cy="1463040"/>
           </a:xfrm>
           <a:prstGeom prst="rect">
             <a:avLst/>
@@ -10405,7 +10405,7 @@
         <p:spPr>
           <a:xfrm>
             <a:off x="640080" y="4416552"/>
-            <a:ext cx="10911535" cy="1097280"/>
+            <a:ext cx="10911535" cy="1847088"/>
           </a:xfrm>
           <a:prstGeom prst="rect">
             <a:avLst/>

--- a/slides/CSC336-Lecture-02-Tiered-Web-Architecture.pptx
+++ b/slides/CSC336-Lecture-02-Tiered-Web-Architecture.pptx
@@ -5160,11 +5160,11 @@
         <p:spPr>
           <a:xfrm>
             <a:off x="640080" y="1965960"/>
-            <a:ext cx="10911535" cy="2606040"/>
+            <a:ext cx="10911535" cy="1882140"/>
           </a:xfrm>
           <a:prstGeom prst="roundRect">
             <a:avLst>
-              <a:gd name="adj" fmla="val 2807"/>
+              <a:gd name="adj" fmla="val 3887"/>
             </a:avLst>
           </a:prstGeom>
           <a:solidFill>
@@ -5182,7 +5182,7 @@
         <p:spPr>
           <a:xfrm>
             <a:off x="960120" y="2194560"/>
-            <a:ext cx="10271455" cy="2148840"/>
+            <a:ext cx="10271455" cy="1424940"/>
           </a:xfrm>
           <a:prstGeom prst="rect">
             <a:avLst/>
@@ -5303,8 +5303,8 @@
         </p:nvSpPr>
         <p:spPr>
           <a:xfrm>
-            <a:off x="640080" y="4800600"/>
-            <a:ext cx="10911535" cy="1463040"/>
+            <a:off x="640080" y="4076700"/>
+            <a:ext cx="10911535" cy="2186940"/>
           </a:xfrm>
           <a:prstGeom prst="rect">
             <a:avLst/>
@@ -10281,11 +10281,11 @@
         <p:spPr>
           <a:xfrm>
             <a:off x="640080" y="1965960"/>
-            <a:ext cx="10911535" cy="2221992"/>
+            <a:ext cx="10911535" cy="1615440"/>
           </a:xfrm>
           <a:prstGeom prst="roundRect">
             <a:avLst>
-              <a:gd name="adj" fmla="val 3292"/>
+              <a:gd name="adj" fmla="val 4528"/>
             </a:avLst>
           </a:prstGeom>
           <a:solidFill>
@@ -10303,7 +10303,7 @@
         <p:spPr>
           <a:xfrm>
             <a:off x="960120" y="2194560"/>
-            <a:ext cx="10271455" cy="1764792"/>
+            <a:ext cx="10271455" cy="1158240"/>
           </a:xfrm>
           <a:prstGeom prst="rect">
             <a:avLst/>
@@ -10404,8 +10404,8 @@
         </p:nvSpPr>
         <p:spPr>
           <a:xfrm>
-            <a:off x="640080" y="4416552"/>
-            <a:ext cx="10911535" cy="1847088"/>
+            <a:off x="640080" y="3810000"/>
+            <a:ext cx="10911535" cy="2453640"/>
           </a:xfrm>
           <a:prstGeom prst="rect">
             <a:avLst/>

--- a/slides/CSC336-Lecture-02-Tiered-Web-Architecture.pptx
+++ b/slides/CSC336-Lecture-02-Tiered-Web-Architecture.pptx
@@ -2569,79 +2569,44 @@
       </p:sp>
       <p:sp>
         <p:nvSpPr>
-          <p:cNvPr id="6" name="Text 4"/>
-          <p:cNvSpPr txBox="1"/>
-          <p:nvPr/>
-        </p:nvSpPr>
-        <p:spPr>
-          <a:xfrm>
-            <a:off x="640080" y="6446520"/>
-            <a:ext cx="8686800" cy="292608"/>
-          </a:xfrm>
-          <a:prstGeom prst="rect">
-            <a:avLst/>
-          </a:prstGeom>
-          <a:noFill/>
-          <a:ln/>
-        </p:spPr>
-        <p:txBody>
-          <a:bodyPr wrap="square" lIns="0" tIns="0" rIns="0" bIns="0" rtlCol="0" anchor="ctr"/>
-          <a:lstStyle/>
-          <a:p>
-            <a:pPr algn="l" indent="0" marL="0">
-              <a:buNone/>
-            </a:pPr>
-            <a:r>
-              <a:rPr lang="en-US" sz="900" dirty="0">
-                <a:solidFill>
-                  <a:srgbClr val="9AA3D8"/>
-                </a:solidFill>
-                <a:latin typeface="Calibri" pitchFamily="34" charset="0"/>
-                <a:ea typeface="Calibri" pitchFamily="34" charset="-122"/>
-                <a:cs typeface="Calibri" pitchFamily="34" charset="-120"/>
-              </a:rPr>
-              <a:t>Usman Akram  •  COMSATS University Islamabad</a:t>
-            </a:r>
-            <a:endParaRPr lang="en-US" sz="900" dirty="0"/>
-          </a:p>
-        </p:txBody>
-      </p:sp>
-      <p:sp>
-        <p:nvSpPr>
-          <p:cNvPr id="7" name="Text 5"/>
-          <p:cNvSpPr txBox="1"/>
-          <p:nvPr/>
-        </p:nvSpPr>
-        <p:spPr>
-          <a:xfrm>
-            <a:off x="11155680" y="6446520"/>
-            <a:ext cx="457200" cy="292608"/>
-          </a:xfrm>
-          <a:prstGeom prst="rect">
-            <a:avLst/>
-          </a:prstGeom>
-          <a:noFill/>
-          <a:ln/>
-        </p:spPr>
-        <p:txBody>
-          <a:bodyPr wrap="square" lIns="0" tIns="0" rIns="0" bIns="0" rtlCol="0" anchor="ctr"/>
-          <a:lstStyle/>
-          <a:p>
-            <a:pPr algn="r" indent="0" marL="0">
-              <a:buNone/>
-            </a:pPr>
-            <a:r>
-              <a:rPr lang="en-US" sz="900" dirty="0">
-                <a:solidFill>
-                  <a:srgbClr val="9AA3D8"/>
-                </a:solidFill>
-                <a:latin typeface="Calibri" pitchFamily="34" charset="0"/>
-                <a:ea typeface="Calibri" pitchFamily="34" charset="-122"/>
-                <a:cs typeface="Calibri" pitchFamily="34" charset="-120"/>
-              </a:rPr>
-              <a:t>1</a:t>
-            </a:r>
-            <a:endParaRPr lang="en-US" sz="900" dirty="0"/>
+          <p:cNvPr id="8" name="cuinotes-footer-mark"/>
+          <p:cNvSpPr txBox="1"/>
+          <p:nvPr/>
+        </p:nvSpPr>
+        <p:spPr>
+          <a:xfrm>
+            <a:off x="9951720" y="6455664"/>
+            <a:ext cx="2011680" cy="292608"/>
+          </a:xfrm>
+          <a:prstGeom prst="rect">
+            <a:avLst/>
+          </a:prstGeom>
+          <a:noFill/>
+        </p:spPr>
+        <p:txBody>
+          <a:bodyPr wrap="none" lIns="0" rIns="0" tIns="0" bIns="0">
+            <a:spAutoFit/>
+          </a:bodyPr>
+          <a:lstStyle/>
+          <a:p>
+            <a:pPr algn="r"/>
+            <a:r>
+              <a:rPr sz="1000">
+                <a:solidFill>
+                  <a:srgbClr val="8A939B"/>
+                </a:solidFill>
+                <a:hlinkClick r:id="rId3"/>
+              </a:rPr>
+              <a:t>cuinotes.com</a:t>
+            </a:r>
+            <a:r>
+              <a:rPr sz="1000">
+                <a:solidFill>
+                  <a:srgbClr val="8A939B"/>
+                </a:solidFill>
+              </a:rPr>
+              <a:t>  ·  1</a:t>
+            </a:r>
           </a:p>
         </p:txBody>
       </p:sp>
@@ -2781,6 +2746,10 @@
             <a:prstDash val="solid"/>
           </a:ln>
         </p:spPr>
+        <p:txBody>
+          <a:bodyPr/>
+          <a:p/>
+        </p:txBody>
       </p:sp>
       <p:sp>
         <p:nvSpPr>
@@ -2932,6 +2901,10 @@
             <a:prstDash val="solid"/>
           </a:ln>
         </p:spPr>
+        <p:txBody>
+          <a:bodyPr/>
+          <a:p/>
+        </p:txBody>
       </p:sp>
       <p:sp>
         <p:nvSpPr>
@@ -3059,79 +3032,44 @@
       </p:sp>
       <p:sp>
         <p:nvSpPr>
-          <p:cNvPr id="10" name="Text 8"/>
-          <p:cNvSpPr txBox="1"/>
-          <p:nvPr/>
-        </p:nvSpPr>
-        <p:spPr>
-          <a:xfrm>
-            <a:off x="640080" y="6446520"/>
-            <a:ext cx="8686800" cy="292608"/>
-          </a:xfrm>
-          <a:prstGeom prst="rect">
-            <a:avLst/>
-          </a:prstGeom>
-          <a:noFill/>
-          <a:ln/>
-        </p:spPr>
-        <p:txBody>
-          <a:bodyPr wrap="square" lIns="0" tIns="0" rIns="0" bIns="0" rtlCol="0" anchor="ctr"/>
-          <a:lstStyle/>
-          <a:p>
-            <a:pPr algn="l" indent="0" marL="0">
-              <a:buNone/>
-            </a:pPr>
-            <a:r>
-              <a:rPr lang="en-US" sz="900" dirty="0">
-                <a:solidFill>
-                  <a:srgbClr val="5D5D72"/>
-                </a:solidFill>
-                <a:latin typeface="Calibri" pitchFamily="34" charset="0"/>
-                <a:ea typeface="Calibri" pitchFamily="34" charset="-122"/>
-                <a:cs typeface="Calibri" pitchFamily="34" charset="-120"/>
-              </a:rPr>
-              <a:t>Usman Akram  •  COMSATS University Islamabad</a:t>
-            </a:r>
-            <a:endParaRPr lang="en-US" sz="900" dirty="0"/>
-          </a:p>
-        </p:txBody>
-      </p:sp>
-      <p:sp>
-        <p:nvSpPr>
-          <p:cNvPr id="11" name="Text 9"/>
-          <p:cNvSpPr txBox="1"/>
-          <p:nvPr/>
-        </p:nvSpPr>
-        <p:spPr>
-          <a:xfrm>
-            <a:off x="11155680" y="6446520"/>
-            <a:ext cx="457200" cy="292608"/>
-          </a:xfrm>
-          <a:prstGeom prst="rect">
-            <a:avLst/>
-          </a:prstGeom>
-          <a:noFill/>
-          <a:ln/>
-        </p:spPr>
-        <p:txBody>
-          <a:bodyPr wrap="square" lIns="0" tIns="0" rIns="0" bIns="0" rtlCol="0" anchor="ctr"/>
-          <a:lstStyle/>
-          <a:p>
-            <a:pPr algn="r" indent="0" marL="0">
-              <a:buNone/>
-            </a:pPr>
-            <a:r>
-              <a:rPr lang="en-US" sz="900" dirty="0">
-                <a:solidFill>
-                  <a:srgbClr val="5D5D72"/>
-                </a:solidFill>
-                <a:latin typeface="Calibri" pitchFamily="34" charset="0"/>
-                <a:ea typeface="Calibri" pitchFamily="34" charset="-122"/>
-                <a:cs typeface="Calibri" pitchFamily="34" charset="-120"/>
-              </a:rPr>
-              <a:t>10</a:t>
-            </a:r>
-            <a:endParaRPr lang="en-US" sz="900" dirty="0"/>
+          <p:cNvPr id="12" name="cuinotes-footer-mark"/>
+          <p:cNvSpPr txBox="1"/>
+          <p:nvPr/>
+        </p:nvSpPr>
+        <p:spPr>
+          <a:xfrm>
+            <a:off x="9951720" y="6455664"/>
+            <a:ext cx="2011680" cy="292608"/>
+          </a:xfrm>
+          <a:prstGeom prst="rect">
+            <a:avLst/>
+          </a:prstGeom>
+          <a:noFill/>
+        </p:spPr>
+        <p:txBody>
+          <a:bodyPr wrap="none" lIns="0" rIns="0" tIns="0" bIns="0">
+            <a:spAutoFit/>
+          </a:bodyPr>
+          <a:lstStyle/>
+          <a:p>
+            <a:pPr algn="r"/>
+            <a:r>
+              <a:rPr sz="1000">
+                <a:solidFill>
+                  <a:srgbClr val="8A939B"/>
+                </a:solidFill>
+                <a:hlinkClick r:id="rId3"/>
+              </a:rPr>
+              <a:t>cuinotes.com</a:t>
+            </a:r>
+            <a:r>
+              <a:rPr sz="1000">
+                <a:solidFill>
+                  <a:srgbClr val="8A939B"/>
+                </a:solidFill>
+              </a:rPr>
+              <a:t>  ·  10</a:t>
+            </a:r>
           </a:p>
         </p:txBody>
       </p:sp>
@@ -3266,6 +3204,10 @@
           </a:solidFill>
           <a:ln/>
         </p:spPr>
+        <p:txBody>
+          <a:bodyPr/>
+          <a:p/>
+        </p:txBody>
       </p:sp>
       <p:sp>
         <p:nvSpPr>
@@ -3346,6 +3288,10 @@
             <a:tailEnd type="triangle"/>
           </a:ln>
         </p:spPr>
+        <p:txBody>
+          <a:bodyPr/>
+          <a:p/>
+        </p:txBody>
       </p:sp>
       <p:sp>
         <p:nvSpPr>
@@ -3368,6 +3314,10 @@
           </a:solidFill>
           <a:ln/>
         </p:spPr>
+        <p:txBody>
+          <a:bodyPr/>
+          <a:p/>
+        </p:txBody>
       </p:sp>
       <p:sp>
         <p:nvSpPr>
@@ -3448,6 +3398,10 @@
             <a:tailEnd type="triangle"/>
           </a:ln>
         </p:spPr>
+        <p:txBody>
+          <a:bodyPr/>
+          <a:p/>
+        </p:txBody>
       </p:sp>
       <p:sp>
         <p:nvSpPr>
@@ -3470,6 +3424,10 @@
           </a:solidFill>
           <a:ln/>
         </p:spPr>
+        <p:txBody>
+          <a:bodyPr/>
+          <a:p/>
+        </p:txBody>
       </p:sp>
       <p:sp>
         <p:nvSpPr>
@@ -3568,79 +3526,44 @@
       </p:sp>
       <p:sp>
         <p:nvSpPr>
-          <p:cNvPr id="13" name="Text 11"/>
-          <p:cNvSpPr txBox="1"/>
-          <p:nvPr/>
-        </p:nvSpPr>
-        <p:spPr>
-          <a:xfrm>
-            <a:off x="640080" y="6446520"/>
-            <a:ext cx="8686800" cy="292608"/>
-          </a:xfrm>
-          <a:prstGeom prst="rect">
-            <a:avLst/>
-          </a:prstGeom>
-          <a:noFill/>
-          <a:ln/>
-        </p:spPr>
-        <p:txBody>
-          <a:bodyPr wrap="square" lIns="0" tIns="0" rIns="0" bIns="0" rtlCol="0" anchor="ctr"/>
-          <a:lstStyle/>
-          <a:p>
-            <a:pPr algn="l" indent="0" marL="0">
-              <a:buNone/>
-            </a:pPr>
-            <a:r>
-              <a:rPr lang="en-US" sz="900" dirty="0">
-                <a:solidFill>
-                  <a:srgbClr val="5D5D72"/>
-                </a:solidFill>
-                <a:latin typeface="Calibri" pitchFamily="34" charset="0"/>
-                <a:ea typeface="Calibri" pitchFamily="34" charset="-122"/>
-                <a:cs typeface="Calibri" pitchFamily="34" charset="-120"/>
-              </a:rPr>
-              <a:t>Usman Akram  •  COMSATS University Islamabad</a:t>
-            </a:r>
-            <a:endParaRPr lang="en-US" sz="900" dirty="0"/>
-          </a:p>
-        </p:txBody>
-      </p:sp>
-      <p:sp>
-        <p:nvSpPr>
-          <p:cNvPr id="14" name="Text 12"/>
-          <p:cNvSpPr txBox="1"/>
-          <p:nvPr/>
-        </p:nvSpPr>
-        <p:spPr>
-          <a:xfrm>
-            <a:off x="11155680" y="6446520"/>
-            <a:ext cx="457200" cy="292608"/>
-          </a:xfrm>
-          <a:prstGeom prst="rect">
-            <a:avLst/>
-          </a:prstGeom>
-          <a:noFill/>
-          <a:ln/>
-        </p:spPr>
-        <p:txBody>
-          <a:bodyPr wrap="square" lIns="0" tIns="0" rIns="0" bIns="0" rtlCol="0" anchor="ctr"/>
-          <a:lstStyle/>
-          <a:p>
-            <a:pPr algn="r" indent="0" marL="0">
-              <a:buNone/>
-            </a:pPr>
-            <a:r>
-              <a:rPr lang="en-US" sz="900" dirty="0">
-                <a:solidFill>
-                  <a:srgbClr val="5D5D72"/>
-                </a:solidFill>
-                <a:latin typeface="Calibri" pitchFamily="34" charset="0"/>
-                <a:ea typeface="Calibri" pitchFamily="34" charset="-122"/>
-                <a:cs typeface="Calibri" pitchFamily="34" charset="-120"/>
-              </a:rPr>
-              <a:t>11</a:t>
-            </a:r>
-            <a:endParaRPr lang="en-US" sz="900" dirty="0"/>
+          <p:cNvPr id="15" name="cuinotes-footer-mark"/>
+          <p:cNvSpPr txBox="1"/>
+          <p:nvPr/>
+        </p:nvSpPr>
+        <p:spPr>
+          <a:xfrm>
+            <a:off x="9951720" y="6455664"/>
+            <a:ext cx="2011680" cy="292608"/>
+          </a:xfrm>
+          <a:prstGeom prst="rect">
+            <a:avLst/>
+          </a:prstGeom>
+          <a:noFill/>
+        </p:spPr>
+        <p:txBody>
+          <a:bodyPr wrap="none" lIns="0" rIns="0" tIns="0" bIns="0">
+            <a:spAutoFit/>
+          </a:bodyPr>
+          <a:lstStyle/>
+          <a:p>
+            <a:pPr algn="r"/>
+            <a:r>
+              <a:rPr sz="1000">
+                <a:solidFill>
+                  <a:srgbClr val="8A939B"/>
+                </a:solidFill>
+                <a:hlinkClick r:id="rId3"/>
+              </a:rPr>
+              <a:t>cuinotes.com</a:t>
+            </a:r>
+            <a:r>
+              <a:rPr sz="1000">
+                <a:solidFill>
+                  <a:srgbClr val="8A939B"/>
+                </a:solidFill>
+              </a:rPr>
+              <a:t>  ·  11</a:t>
+            </a:r>
           </a:p>
         </p:txBody>
       </p:sp>
@@ -3812,6 +3735,10 @@
           </a:solidFill>
           <a:ln/>
         </p:spPr>
+        <p:txBody>
+          <a:bodyPr/>
+          <a:p/>
+        </p:txBody>
       </p:sp>
       <p:sp>
         <p:nvSpPr>
@@ -3871,6 +3798,10 @@
           </a:solidFill>
           <a:ln/>
         </p:spPr>
+        <p:txBody>
+          <a:bodyPr/>
+          <a:p/>
+        </p:txBody>
       </p:sp>
       <p:sp>
         <p:nvSpPr>
@@ -3930,6 +3861,10 @@
           </a:solidFill>
           <a:ln/>
         </p:spPr>
+        <p:txBody>
+          <a:bodyPr/>
+          <a:p/>
+        </p:txBody>
       </p:sp>
       <p:sp>
         <p:nvSpPr>
@@ -3972,79 +3907,44 @@
       </p:sp>
       <p:sp>
         <p:nvSpPr>
-          <p:cNvPr id="11" name="Text 9"/>
-          <p:cNvSpPr txBox="1"/>
-          <p:nvPr/>
-        </p:nvSpPr>
-        <p:spPr>
-          <a:xfrm>
-            <a:off x="640080" y="6446520"/>
-            <a:ext cx="8686800" cy="292608"/>
-          </a:xfrm>
-          <a:prstGeom prst="rect">
-            <a:avLst/>
-          </a:prstGeom>
-          <a:noFill/>
-          <a:ln/>
-        </p:spPr>
-        <p:txBody>
-          <a:bodyPr wrap="square" lIns="0" tIns="0" rIns="0" bIns="0" rtlCol="0" anchor="ctr"/>
-          <a:lstStyle/>
-          <a:p>
-            <a:pPr algn="l" indent="0" marL="0">
-              <a:buNone/>
-            </a:pPr>
-            <a:r>
-              <a:rPr lang="en-US" sz="900" dirty="0">
-                <a:solidFill>
-                  <a:srgbClr val="5D5D72"/>
-                </a:solidFill>
-                <a:latin typeface="Calibri" pitchFamily="34" charset="0"/>
-                <a:ea typeface="Calibri" pitchFamily="34" charset="-122"/>
-                <a:cs typeface="Calibri" pitchFamily="34" charset="-120"/>
-              </a:rPr>
-              <a:t>Usman Akram  •  COMSATS University Islamabad</a:t>
-            </a:r>
-            <a:endParaRPr lang="en-US" sz="900" dirty="0"/>
-          </a:p>
-        </p:txBody>
-      </p:sp>
-      <p:sp>
-        <p:nvSpPr>
-          <p:cNvPr id="12" name="Text 10"/>
-          <p:cNvSpPr txBox="1"/>
-          <p:nvPr/>
-        </p:nvSpPr>
-        <p:spPr>
-          <a:xfrm>
-            <a:off x="11155680" y="6446520"/>
-            <a:ext cx="457200" cy="292608"/>
-          </a:xfrm>
-          <a:prstGeom prst="rect">
-            <a:avLst/>
-          </a:prstGeom>
-          <a:noFill/>
-          <a:ln/>
-        </p:spPr>
-        <p:txBody>
-          <a:bodyPr wrap="square" lIns="0" tIns="0" rIns="0" bIns="0" rtlCol="0" anchor="ctr"/>
-          <a:lstStyle/>
-          <a:p>
-            <a:pPr algn="r" indent="0" marL="0">
-              <a:buNone/>
-            </a:pPr>
-            <a:r>
-              <a:rPr lang="en-US" sz="900" dirty="0">
-                <a:solidFill>
-                  <a:srgbClr val="5D5D72"/>
-                </a:solidFill>
-                <a:latin typeface="Calibri" pitchFamily="34" charset="0"/>
-                <a:ea typeface="Calibri" pitchFamily="34" charset="-122"/>
-                <a:cs typeface="Calibri" pitchFamily="34" charset="-120"/>
-              </a:rPr>
-              <a:t>12</a:t>
-            </a:r>
-            <a:endParaRPr lang="en-US" sz="900" dirty="0"/>
+          <p:cNvPr id="13" name="cuinotes-footer-mark"/>
+          <p:cNvSpPr txBox="1"/>
+          <p:nvPr/>
+        </p:nvSpPr>
+        <p:spPr>
+          <a:xfrm>
+            <a:off x="9951720" y="6455664"/>
+            <a:ext cx="2011680" cy="292608"/>
+          </a:xfrm>
+          <a:prstGeom prst="rect">
+            <a:avLst/>
+          </a:prstGeom>
+          <a:noFill/>
+        </p:spPr>
+        <p:txBody>
+          <a:bodyPr wrap="none" lIns="0" rIns="0" tIns="0" bIns="0">
+            <a:spAutoFit/>
+          </a:bodyPr>
+          <a:lstStyle/>
+          <a:p>
+            <a:pPr algn="r"/>
+            <a:r>
+              <a:rPr sz="1000">
+                <a:solidFill>
+                  <a:srgbClr val="8A939B"/>
+                </a:solidFill>
+                <a:hlinkClick r:id="rId3"/>
+              </a:rPr>
+              <a:t>cuinotes.com</a:t>
+            </a:r>
+            <a:r>
+              <a:rPr sz="1000">
+                <a:solidFill>
+                  <a:srgbClr val="8A939B"/>
+                </a:solidFill>
+              </a:rPr>
+              <a:t>  ·  12</a:t>
+            </a:r>
           </a:p>
         </p:txBody>
       </p:sp>
@@ -4184,6 +4084,10 @@
             <a:prstDash val="solid"/>
           </a:ln>
         </p:spPr>
+        <p:txBody>
+          <a:bodyPr/>
+          <a:p/>
+        </p:txBody>
       </p:sp>
       <p:sp>
         <p:nvSpPr>
@@ -4356,6 +4260,10 @@
             <a:prstDash val="solid"/>
           </a:ln>
         </p:spPr>
+        <p:txBody>
+          <a:bodyPr/>
+          <a:p/>
+        </p:txBody>
       </p:sp>
       <p:sp>
         <p:nvSpPr>
@@ -4483,79 +4391,44 @@
       </p:sp>
       <p:sp>
         <p:nvSpPr>
-          <p:cNvPr id="10" name="Text 8"/>
-          <p:cNvSpPr txBox="1"/>
-          <p:nvPr/>
-        </p:nvSpPr>
-        <p:spPr>
-          <a:xfrm>
-            <a:off x="640080" y="6446520"/>
-            <a:ext cx="8686800" cy="292608"/>
-          </a:xfrm>
-          <a:prstGeom prst="rect">
-            <a:avLst/>
-          </a:prstGeom>
-          <a:noFill/>
-          <a:ln/>
-        </p:spPr>
-        <p:txBody>
-          <a:bodyPr wrap="square" lIns="0" tIns="0" rIns="0" bIns="0" rtlCol="0" anchor="ctr"/>
-          <a:lstStyle/>
-          <a:p>
-            <a:pPr algn="l" indent="0" marL="0">
-              <a:buNone/>
-            </a:pPr>
-            <a:r>
-              <a:rPr lang="en-US" sz="900" dirty="0">
-                <a:solidFill>
-                  <a:srgbClr val="5D5D72"/>
-                </a:solidFill>
-                <a:latin typeface="Calibri" pitchFamily="34" charset="0"/>
-                <a:ea typeface="Calibri" pitchFamily="34" charset="-122"/>
-                <a:cs typeface="Calibri" pitchFamily="34" charset="-120"/>
-              </a:rPr>
-              <a:t>Usman Akram  •  COMSATS University Islamabad</a:t>
-            </a:r>
-            <a:endParaRPr lang="en-US" sz="900" dirty="0"/>
-          </a:p>
-        </p:txBody>
-      </p:sp>
-      <p:sp>
-        <p:nvSpPr>
-          <p:cNvPr id="11" name="Text 9"/>
-          <p:cNvSpPr txBox="1"/>
-          <p:nvPr/>
-        </p:nvSpPr>
-        <p:spPr>
-          <a:xfrm>
-            <a:off x="11155680" y="6446520"/>
-            <a:ext cx="457200" cy="292608"/>
-          </a:xfrm>
-          <a:prstGeom prst="rect">
-            <a:avLst/>
-          </a:prstGeom>
-          <a:noFill/>
-          <a:ln/>
-        </p:spPr>
-        <p:txBody>
-          <a:bodyPr wrap="square" lIns="0" tIns="0" rIns="0" bIns="0" rtlCol="0" anchor="ctr"/>
-          <a:lstStyle/>
-          <a:p>
-            <a:pPr algn="r" indent="0" marL="0">
-              <a:buNone/>
-            </a:pPr>
-            <a:r>
-              <a:rPr lang="en-US" sz="900" dirty="0">
-                <a:solidFill>
-                  <a:srgbClr val="5D5D72"/>
-                </a:solidFill>
-                <a:latin typeface="Calibri" pitchFamily="34" charset="0"/>
-                <a:ea typeface="Calibri" pitchFamily="34" charset="-122"/>
-                <a:cs typeface="Calibri" pitchFamily="34" charset="-120"/>
-              </a:rPr>
-              <a:t>13</a:t>
-            </a:r>
-            <a:endParaRPr lang="en-US" sz="900" dirty="0"/>
+          <p:cNvPr id="12" name="cuinotes-footer-mark"/>
+          <p:cNvSpPr txBox="1"/>
+          <p:nvPr/>
+        </p:nvSpPr>
+        <p:spPr>
+          <a:xfrm>
+            <a:off x="9951720" y="6455664"/>
+            <a:ext cx="2011680" cy="292608"/>
+          </a:xfrm>
+          <a:prstGeom prst="rect">
+            <a:avLst/>
+          </a:prstGeom>
+          <a:noFill/>
+        </p:spPr>
+        <p:txBody>
+          <a:bodyPr wrap="none" lIns="0" rIns="0" tIns="0" bIns="0">
+            <a:spAutoFit/>
+          </a:bodyPr>
+          <a:lstStyle/>
+          <a:p>
+            <a:pPr algn="r"/>
+            <a:r>
+              <a:rPr sz="1000">
+                <a:solidFill>
+                  <a:srgbClr val="8A939B"/>
+                </a:solidFill>
+                <a:hlinkClick r:id="rId3"/>
+              </a:rPr>
+              <a:t>cuinotes.com</a:t>
+            </a:r>
+            <a:r>
+              <a:rPr sz="1000">
+                <a:solidFill>
+                  <a:srgbClr val="8A939B"/>
+                </a:solidFill>
+              </a:rPr>
+              <a:t>  ·  13</a:t>
+            </a:r>
           </a:p>
         </p:txBody>
       </p:sp>
@@ -4688,6 +4561,10 @@
           </a:solidFill>
           <a:ln/>
         </p:spPr>
+        <p:txBody>
+          <a:bodyPr/>
+          <a:p/>
+        </p:txBody>
       </p:sp>
       <p:sp>
         <p:nvSpPr>
@@ -4786,6 +4663,10 @@
           </a:solidFill>
           <a:ln/>
         </p:spPr>
+        <p:txBody>
+          <a:bodyPr/>
+          <a:p/>
+        </p:txBody>
       </p:sp>
       <p:sp>
         <p:nvSpPr>
@@ -4884,6 +4765,10 @@
           </a:solidFill>
           <a:ln/>
         </p:spPr>
+        <p:txBody>
+          <a:bodyPr/>
+          <a:p/>
+        </p:txBody>
       </p:sp>
       <p:sp>
         <p:nvSpPr>
@@ -4965,79 +4850,44 @@
       </p:sp>
       <p:sp>
         <p:nvSpPr>
-          <p:cNvPr id="13" name="Text 11"/>
-          <p:cNvSpPr txBox="1"/>
-          <p:nvPr/>
-        </p:nvSpPr>
-        <p:spPr>
-          <a:xfrm>
-            <a:off x="640080" y="6446520"/>
-            <a:ext cx="8686800" cy="292608"/>
-          </a:xfrm>
-          <a:prstGeom prst="rect">
-            <a:avLst/>
-          </a:prstGeom>
-          <a:noFill/>
-          <a:ln/>
-        </p:spPr>
-        <p:txBody>
-          <a:bodyPr wrap="square" lIns="0" tIns="0" rIns="0" bIns="0" rtlCol="0" anchor="ctr"/>
-          <a:lstStyle/>
-          <a:p>
-            <a:pPr algn="l" indent="0" marL="0">
-              <a:buNone/>
-            </a:pPr>
-            <a:r>
-              <a:rPr lang="en-US" sz="900" dirty="0">
-                <a:solidFill>
-                  <a:srgbClr val="5D5D72"/>
-                </a:solidFill>
-                <a:latin typeface="Calibri" pitchFamily="34" charset="0"/>
-                <a:ea typeface="Calibri" pitchFamily="34" charset="-122"/>
-                <a:cs typeface="Calibri" pitchFamily="34" charset="-120"/>
-              </a:rPr>
-              <a:t>Usman Akram  •  COMSATS University Islamabad</a:t>
-            </a:r>
-            <a:endParaRPr lang="en-US" sz="900" dirty="0"/>
-          </a:p>
-        </p:txBody>
-      </p:sp>
-      <p:sp>
-        <p:nvSpPr>
-          <p:cNvPr id="14" name="Text 12"/>
-          <p:cNvSpPr txBox="1"/>
-          <p:nvPr/>
-        </p:nvSpPr>
-        <p:spPr>
-          <a:xfrm>
-            <a:off x="11155680" y="6446520"/>
-            <a:ext cx="457200" cy="292608"/>
-          </a:xfrm>
-          <a:prstGeom prst="rect">
-            <a:avLst/>
-          </a:prstGeom>
-          <a:noFill/>
-          <a:ln/>
-        </p:spPr>
-        <p:txBody>
-          <a:bodyPr wrap="square" lIns="0" tIns="0" rIns="0" bIns="0" rtlCol="0" anchor="ctr"/>
-          <a:lstStyle/>
-          <a:p>
-            <a:pPr algn="r" indent="0" marL="0">
-              <a:buNone/>
-            </a:pPr>
-            <a:r>
-              <a:rPr lang="en-US" sz="900" dirty="0">
-                <a:solidFill>
-                  <a:srgbClr val="5D5D72"/>
-                </a:solidFill>
-                <a:latin typeface="Calibri" pitchFamily="34" charset="0"/>
-                <a:ea typeface="Calibri" pitchFamily="34" charset="-122"/>
-                <a:cs typeface="Calibri" pitchFamily="34" charset="-120"/>
-              </a:rPr>
-              <a:t>14</a:t>
-            </a:r>
-            <a:endParaRPr lang="en-US" sz="900" dirty="0"/>
+          <p:cNvPr id="15" name="cuinotes-footer-mark"/>
+          <p:cNvSpPr txBox="1"/>
+          <p:nvPr/>
+        </p:nvSpPr>
+        <p:spPr>
+          <a:xfrm>
+            <a:off x="9951720" y="6455664"/>
+            <a:ext cx="2011680" cy="292608"/>
+          </a:xfrm>
+          <a:prstGeom prst="rect">
+            <a:avLst/>
+          </a:prstGeom>
+          <a:noFill/>
+        </p:spPr>
+        <p:txBody>
+          <a:bodyPr wrap="none" lIns="0" rIns="0" tIns="0" bIns="0">
+            <a:spAutoFit/>
+          </a:bodyPr>
+          <a:lstStyle/>
+          <a:p>
+            <a:pPr algn="r"/>
+            <a:r>
+              <a:rPr sz="1000">
+                <a:solidFill>
+                  <a:srgbClr val="8A939B"/>
+                </a:solidFill>
+                <a:hlinkClick r:id="rId3"/>
+              </a:rPr>
+              <a:t>cuinotes.com</a:t>
+            </a:r>
+            <a:r>
+              <a:rPr sz="1000">
+                <a:solidFill>
+                  <a:srgbClr val="8A939B"/>
+                </a:solidFill>
+              </a:rPr>
+              <a:t>  ·  14</a:t>
+            </a:r>
           </a:p>
         </p:txBody>
       </p:sp>
@@ -5172,6 +5022,10 @@
           </a:solidFill>
           <a:ln/>
         </p:spPr>
+        <p:txBody>
+          <a:bodyPr/>
+          <a:p/>
+        </p:txBody>
       </p:sp>
       <p:sp>
         <p:nvSpPr>
@@ -5336,79 +5190,44 @@
       </p:sp>
       <p:sp>
         <p:nvSpPr>
-          <p:cNvPr id="7" name="Text 5"/>
-          <p:cNvSpPr txBox="1"/>
-          <p:nvPr/>
-        </p:nvSpPr>
-        <p:spPr>
-          <a:xfrm>
-            <a:off x="640080" y="6446520"/>
-            <a:ext cx="8686800" cy="292608"/>
-          </a:xfrm>
-          <a:prstGeom prst="rect">
-            <a:avLst/>
-          </a:prstGeom>
-          <a:noFill/>
-          <a:ln/>
-        </p:spPr>
-        <p:txBody>
-          <a:bodyPr wrap="square" lIns="0" tIns="0" rIns="0" bIns="0" rtlCol="0" anchor="ctr"/>
-          <a:lstStyle/>
-          <a:p>
-            <a:pPr algn="l" indent="0" marL="0">
-              <a:buNone/>
-            </a:pPr>
-            <a:r>
-              <a:rPr lang="en-US" sz="900" dirty="0">
-                <a:solidFill>
-                  <a:srgbClr val="5D5D72"/>
-                </a:solidFill>
-                <a:latin typeface="Calibri" pitchFamily="34" charset="0"/>
-                <a:ea typeface="Calibri" pitchFamily="34" charset="-122"/>
-                <a:cs typeface="Calibri" pitchFamily="34" charset="-120"/>
-              </a:rPr>
-              <a:t>Usman Akram  •  COMSATS University Islamabad</a:t>
-            </a:r>
-            <a:endParaRPr lang="en-US" sz="900" dirty="0"/>
-          </a:p>
-        </p:txBody>
-      </p:sp>
-      <p:sp>
-        <p:nvSpPr>
-          <p:cNvPr id="8" name="Text 6"/>
-          <p:cNvSpPr txBox="1"/>
-          <p:nvPr/>
-        </p:nvSpPr>
-        <p:spPr>
-          <a:xfrm>
-            <a:off x="11155680" y="6446520"/>
-            <a:ext cx="457200" cy="292608"/>
-          </a:xfrm>
-          <a:prstGeom prst="rect">
-            <a:avLst/>
-          </a:prstGeom>
-          <a:noFill/>
-          <a:ln/>
-        </p:spPr>
-        <p:txBody>
-          <a:bodyPr wrap="square" lIns="0" tIns="0" rIns="0" bIns="0" rtlCol="0" anchor="ctr"/>
-          <a:lstStyle/>
-          <a:p>
-            <a:pPr algn="r" indent="0" marL="0">
-              <a:buNone/>
-            </a:pPr>
-            <a:r>
-              <a:rPr lang="en-US" sz="900" dirty="0">
-                <a:solidFill>
-                  <a:srgbClr val="5D5D72"/>
-                </a:solidFill>
-                <a:latin typeface="Calibri" pitchFamily="34" charset="0"/>
-                <a:ea typeface="Calibri" pitchFamily="34" charset="-122"/>
-                <a:cs typeface="Calibri" pitchFamily="34" charset="-120"/>
-              </a:rPr>
-              <a:t>15</a:t>
-            </a:r>
-            <a:endParaRPr lang="en-US" sz="900" dirty="0"/>
+          <p:cNvPr id="9" name="cuinotes-footer-mark"/>
+          <p:cNvSpPr txBox="1"/>
+          <p:nvPr/>
+        </p:nvSpPr>
+        <p:spPr>
+          <a:xfrm>
+            <a:off x="9951720" y="6455664"/>
+            <a:ext cx="2011680" cy="292608"/>
+          </a:xfrm>
+          <a:prstGeom prst="rect">
+            <a:avLst/>
+          </a:prstGeom>
+          <a:noFill/>
+        </p:spPr>
+        <p:txBody>
+          <a:bodyPr wrap="none" lIns="0" rIns="0" tIns="0" bIns="0">
+            <a:spAutoFit/>
+          </a:bodyPr>
+          <a:lstStyle/>
+          <a:p>
+            <a:pPr algn="r"/>
+            <a:r>
+              <a:rPr sz="1000">
+                <a:solidFill>
+                  <a:srgbClr val="8A939B"/>
+                </a:solidFill>
+                <a:hlinkClick r:id="rId3"/>
+              </a:rPr>
+              <a:t>cuinotes.com</a:t>
+            </a:r>
+            <a:r>
+              <a:rPr sz="1000">
+                <a:solidFill>
+                  <a:srgbClr val="8A939B"/>
+                </a:solidFill>
+              </a:rPr>
+              <a:t>  ·  15</a:t>
+            </a:r>
           </a:p>
         </p:txBody>
       </p:sp>
@@ -6145,79 +5964,44 @@
       </p:sp>
       <p:sp>
         <p:nvSpPr>
-          <p:cNvPr id="6" name="Text 3"/>
-          <p:cNvSpPr txBox="1"/>
-          <p:nvPr/>
-        </p:nvSpPr>
-        <p:spPr>
-          <a:xfrm>
-            <a:off x="640080" y="6446520"/>
-            <a:ext cx="8686800" cy="292608"/>
-          </a:xfrm>
-          <a:prstGeom prst="rect">
-            <a:avLst/>
-          </a:prstGeom>
-          <a:noFill/>
-          <a:ln/>
-        </p:spPr>
-        <p:txBody>
-          <a:bodyPr wrap="square" lIns="0" tIns="0" rIns="0" bIns="0" rtlCol="0" anchor="ctr"/>
-          <a:lstStyle/>
-          <a:p>
-            <a:pPr algn="l" indent="0" marL="0">
-              <a:buNone/>
-            </a:pPr>
-            <a:r>
-              <a:rPr lang="en-US" sz="900" dirty="0">
-                <a:solidFill>
-                  <a:srgbClr val="5D5D72"/>
-                </a:solidFill>
-                <a:latin typeface="Calibri" pitchFamily="34" charset="0"/>
-                <a:ea typeface="Calibri" pitchFamily="34" charset="-122"/>
-                <a:cs typeface="Calibri" pitchFamily="34" charset="-120"/>
-              </a:rPr>
-              <a:t>Usman Akram  •  COMSATS University Islamabad</a:t>
-            </a:r>
-            <a:endParaRPr lang="en-US" sz="900" dirty="0"/>
-          </a:p>
-        </p:txBody>
-      </p:sp>
-      <p:sp>
-        <p:nvSpPr>
-          <p:cNvPr id="7" name="Text 4"/>
-          <p:cNvSpPr txBox="1"/>
-          <p:nvPr/>
-        </p:nvSpPr>
-        <p:spPr>
-          <a:xfrm>
-            <a:off x="11155680" y="6446520"/>
-            <a:ext cx="457200" cy="292608"/>
-          </a:xfrm>
-          <a:prstGeom prst="rect">
-            <a:avLst/>
-          </a:prstGeom>
-          <a:noFill/>
-          <a:ln/>
-        </p:spPr>
-        <p:txBody>
-          <a:bodyPr wrap="square" lIns="0" tIns="0" rIns="0" bIns="0" rtlCol="0" anchor="ctr"/>
-          <a:lstStyle/>
-          <a:p>
-            <a:pPr algn="r" indent="0" marL="0">
-              <a:buNone/>
-            </a:pPr>
-            <a:r>
-              <a:rPr lang="en-US" sz="900" dirty="0">
-                <a:solidFill>
-                  <a:srgbClr val="5D5D72"/>
-                </a:solidFill>
-                <a:latin typeface="Calibri" pitchFamily="34" charset="0"/>
-                <a:ea typeface="Calibri" pitchFamily="34" charset="-122"/>
-                <a:cs typeface="Calibri" pitchFamily="34" charset="-120"/>
-              </a:rPr>
-              <a:t>16</a:t>
-            </a:r>
-            <a:endParaRPr lang="en-US" sz="900" dirty="0"/>
+          <p:cNvPr id="18" name="cuinotes-footer-mark"/>
+          <p:cNvSpPr txBox="1"/>
+          <p:nvPr/>
+        </p:nvSpPr>
+        <p:spPr>
+          <a:xfrm>
+            <a:off x="9951720" y="6455664"/>
+            <a:ext cx="2011680" cy="292608"/>
+          </a:xfrm>
+          <a:prstGeom prst="rect">
+            <a:avLst/>
+          </a:prstGeom>
+          <a:noFill/>
+        </p:spPr>
+        <p:txBody>
+          <a:bodyPr wrap="none" lIns="0" rIns="0" tIns="0" bIns="0">
+            <a:spAutoFit/>
+          </a:bodyPr>
+          <a:lstStyle/>
+          <a:p>
+            <a:pPr algn="r"/>
+            <a:r>
+              <a:rPr sz="1000">
+                <a:solidFill>
+                  <a:srgbClr val="8A939B"/>
+                </a:solidFill>
+                <a:hlinkClick r:id="rId3"/>
+              </a:rPr>
+              <a:t>cuinotes.com</a:t>
+            </a:r>
+            <a:r>
+              <a:rPr sz="1000">
+                <a:solidFill>
+                  <a:srgbClr val="8A939B"/>
+                </a:solidFill>
+              </a:rPr>
+              <a:t>  ·  16</a:t>
+            </a:r>
           </a:p>
         </p:txBody>
       </p:sp>
@@ -6357,6 +6141,10 @@
             <a:prstDash val="solid"/>
           </a:ln>
         </p:spPr>
+        <p:txBody>
+          <a:bodyPr/>
+          <a:p/>
+        </p:txBody>
       </p:sp>
       <p:sp>
         <p:nvSpPr>
@@ -6438,79 +6226,44 @@
       </p:sp>
       <p:sp>
         <p:nvSpPr>
-          <p:cNvPr id="7" name="Text 5"/>
-          <p:cNvSpPr txBox="1"/>
-          <p:nvPr/>
-        </p:nvSpPr>
-        <p:spPr>
-          <a:xfrm>
-            <a:off x="640080" y="6446520"/>
-            <a:ext cx="8686800" cy="292608"/>
-          </a:xfrm>
-          <a:prstGeom prst="rect">
-            <a:avLst/>
-          </a:prstGeom>
-          <a:noFill/>
-          <a:ln/>
-        </p:spPr>
-        <p:txBody>
-          <a:bodyPr wrap="square" lIns="0" tIns="0" rIns="0" bIns="0" rtlCol="0" anchor="ctr"/>
-          <a:lstStyle/>
-          <a:p>
-            <a:pPr algn="l" indent="0" marL="0">
-              <a:buNone/>
-            </a:pPr>
-            <a:r>
-              <a:rPr lang="en-US" sz="900" dirty="0">
-                <a:solidFill>
-                  <a:srgbClr val="5D5D72"/>
-                </a:solidFill>
-                <a:latin typeface="Calibri" pitchFamily="34" charset="0"/>
-                <a:ea typeface="Calibri" pitchFamily="34" charset="-122"/>
-                <a:cs typeface="Calibri" pitchFamily="34" charset="-120"/>
-              </a:rPr>
-              <a:t>Usman Akram  •  COMSATS University Islamabad</a:t>
-            </a:r>
-            <a:endParaRPr lang="en-US" sz="900" dirty="0"/>
-          </a:p>
-        </p:txBody>
-      </p:sp>
-      <p:sp>
-        <p:nvSpPr>
-          <p:cNvPr id="8" name="Text 6"/>
-          <p:cNvSpPr txBox="1"/>
-          <p:nvPr/>
-        </p:nvSpPr>
-        <p:spPr>
-          <a:xfrm>
-            <a:off x="11155680" y="6446520"/>
-            <a:ext cx="457200" cy="292608"/>
-          </a:xfrm>
-          <a:prstGeom prst="rect">
-            <a:avLst/>
-          </a:prstGeom>
-          <a:noFill/>
-          <a:ln/>
-        </p:spPr>
-        <p:txBody>
-          <a:bodyPr wrap="square" lIns="0" tIns="0" rIns="0" bIns="0" rtlCol="0" anchor="ctr"/>
-          <a:lstStyle/>
-          <a:p>
-            <a:pPr algn="r" indent="0" marL="0">
-              <a:buNone/>
-            </a:pPr>
-            <a:r>
-              <a:rPr lang="en-US" sz="900" dirty="0">
-                <a:solidFill>
-                  <a:srgbClr val="5D5D72"/>
-                </a:solidFill>
-                <a:latin typeface="Calibri" pitchFamily="34" charset="0"/>
-                <a:ea typeface="Calibri" pitchFamily="34" charset="-122"/>
-                <a:cs typeface="Calibri" pitchFamily="34" charset="-120"/>
-              </a:rPr>
-              <a:t>17</a:t>
-            </a:r>
-            <a:endParaRPr lang="en-US" sz="900" dirty="0"/>
+          <p:cNvPr id="9" name="cuinotes-footer-mark"/>
+          <p:cNvSpPr txBox="1"/>
+          <p:nvPr/>
+        </p:nvSpPr>
+        <p:spPr>
+          <a:xfrm>
+            <a:off x="9951720" y="6455664"/>
+            <a:ext cx="2011680" cy="292608"/>
+          </a:xfrm>
+          <a:prstGeom prst="rect">
+            <a:avLst/>
+          </a:prstGeom>
+          <a:noFill/>
+        </p:spPr>
+        <p:txBody>
+          <a:bodyPr wrap="none" lIns="0" rIns="0" tIns="0" bIns="0">
+            <a:spAutoFit/>
+          </a:bodyPr>
+          <a:lstStyle/>
+          <a:p>
+            <a:pPr algn="r"/>
+            <a:r>
+              <a:rPr sz="1000">
+                <a:solidFill>
+                  <a:srgbClr val="8A939B"/>
+                </a:solidFill>
+                <a:hlinkClick r:id="rId3"/>
+              </a:rPr>
+              <a:t>cuinotes.com</a:t>
+            </a:r>
+            <a:r>
+              <a:rPr sz="1000">
+                <a:solidFill>
+                  <a:srgbClr val="8A939B"/>
+                </a:solidFill>
+              </a:rPr>
+              <a:t>  ·  17</a:t>
+            </a:r>
           </a:p>
         </p:txBody>
       </p:sp>
@@ -6643,6 +6396,10 @@
           </a:solidFill>
           <a:ln/>
         </p:spPr>
+        <p:txBody>
+          <a:bodyPr/>
+          <a:p/>
+        </p:txBody>
       </p:sp>
       <p:sp>
         <p:nvSpPr>
@@ -6741,6 +6498,10 @@
           </a:solidFill>
           <a:ln/>
         </p:spPr>
+        <p:txBody>
+          <a:bodyPr/>
+          <a:p/>
+        </p:txBody>
       </p:sp>
       <p:sp>
         <p:nvSpPr>
@@ -6839,6 +6600,10 @@
           </a:solidFill>
           <a:ln/>
         </p:spPr>
+        <p:txBody>
+          <a:bodyPr/>
+          <a:p/>
+        </p:txBody>
       </p:sp>
       <p:sp>
         <p:nvSpPr>
@@ -6937,6 +6702,10 @@
           </a:solidFill>
           <a:ln/>
         </p:spPr>
+        <p:txBody>
+          <a:bodyPr/>
+          <a:p/>
+        </p:txBody>
       </p:sp>
       <p:sp>
         <p:nvSpPr>
@@ -7035,6 +6804,10 @@
           </a:solidFill>
           <a:ln/>
         </p:spPr>
+        <p:txBody>
+          <a:bodyPr/>
+          <a:p/>
+        </p:txBody>
       </p:sp>
       <p:sp>
         <p:nvSpPr>
@@ -7133,6 +6906,10 @@
           </a:solidFill>
           <a:ln/>
         </p:spPr>
+        <p:txBody>
+          <a:bodyPr/>
+          <a:p/>
+        </p:txBody>
       </p:sp>
       <p:sp>
         <p:nvSpPr>
@@ -7214,79 +6991,44 @@
       </p:sp>
       <p:sp>
         <p:nvSpPr>
-          <p:cNvPr id="22" name="Text 20"/>
-          <p:cNvSpPr txBox="1"/>
-          <p:nvPr/>
-        </p:nvSpPr>
-        <p:spPr>
-          <a:xfrm>
-            <a:off x="640080" y="6446520"/>
-            <a:ext cx="8686800" cy="292608"/>
-          </a:xfrm>
-          <a:prstGeom prst="rect">
-            <a:avLst/>
-          </a:prstGeom>
-          <a:noFill/>
-          <a:ln/>
-        </p:spPr>
-        <p:txBody>
-          <a:bodyPr wrap="square" lIns="0" tIns="0" rIns="0" bIns="0" rtlCol="0" anchor="ctr"/>
-          <a:lstStyle/>
-          <a:p>
-            <a:pPr algn="l" indent="0" marL="0">
-              <a:buNone/>
-            </a:pPr>
-            <a:r>
-              <a:rPr lang="en-US" sz="900" dirty="0">
-                <a:solidFill>
-                  <a:srgbClr val="9AA3D8"/>
-                </a:solidFill>
-                <a:latin typeface="Calibri" pitchFamily="34" charset="0"/>
-                <a:ea typeface="Calibri" pitchFamily="34" charset="-122"/>
-                <a:cs typeface="Calibri" pitchFamily="34" charset="-120"/>
-              </a:rPr>
-              <a:t>Usman Akram  •  COMSATS University Islamabad</a:t>
-            </a:r>
-            <a:endParaRPr lang="en-US" sz="900" dirty="0"/>
-          </a:p>
-        </p:txBody>
-      </p:sp>
-      <p:sp>
-        <p:nvSpPr>
-          <p:cNvPr id="23" name="Text 21"/>
-          <p:cNvSpPr txBox="1"/>
-          <p:nvPr/>
-        </p:nvSpPr>
-        <p:spPr>
-          <a:xfrm>
-            <a:off x="11155680" y="6446520"/>
-            <a:ext cx="457200" cy="292608"/>
-          </a:xfrm>
-          <a:prstGeom prst="rect">
-            <a:avLst/>
-          </a:prstGeom>
-          <a:noFill/>
-          <a:ln/>
-        </p:spPr>
-        <p:txBody>
-          <a:bodyPr wrap="square" lIns="0" tIns="0" rIns="0" bIns="0" rtlCol="0" anchor="ctr"/>
-          <a:lstStyle/>
-          <a:p>
-            <a:pPr algn="r" indent="0" marL="0">
-              <a:buNone/>
-            </a:pPr>
-            <a:r>
-              <a:rPr lang="en-US" sz="900" dirty="0">
-                <a:solidFill>
-                  <a:srgbClr val="9AA3D8"/>
-                </a:solidFill>
-                <a:latin typeface="Calibri" pitchFamily="34" charset="0"/>
-                <a:ea typeface="Calibri" pitchFamily="34" charset="-122"/>
-                <a:cs typeface="Calibri" pitchFamily="34" charset="-120"/>
-              </a:rPr>
-              <a:t>18</a:t>
-            </a:r>
-            <a:endParaRPr lang="en-US" sz="900" dirty="0"/>
+          <p:cNvPr id="24" name="cuinotes-footer-mark"/>
+          <p:cNvSpPr txBox="1"/>
+          <p:nvPr/>
+        </p:nvSpPr>
+        <p:spPr>
+          <a:xfrm>
+            <a:off x="9951720" y="6455664"/>
+            <a:ext cx="2011680" cy="292608"/>
+          </a:xfrm>
+          <a:prstGeom prst="rect">
+            <a:avLst/>
+          </a:prstGeom>
+          <a:noFill/>
+        </p:spPr>
+        <p:txBody>
+          <a:bodyPr wrap="none" lIns="0" rIns="0" tIns="0" bIns="0">
+            <a:spAutoFit/>
+          </a:bodyPr>
+          <a:lstStyle/>
+          <a:p>
+            <a:pPr algn="r"/>
+            <a:r>
+              <a:rPr sz="1000">
+                <a:solidFill>
+                  <a:srgbClr val="8A939B"/>
+                </a:solidFill>
+                <a:hlinkClick r:id="rId3"/>
+              </a:rPr>
+              <a:t>cuinotes.com</a:t>
+            </a:r>
+            <a:r>
+              <a:rPr sz="1000">
+                <a:solidFill>
+                  <a:srgbClr val="8A939B"/>
+                </a:solidFill>
+              </a:rPr>
+              <a:t>  ·  18</a:t>
+            </a:r>
           </a:p>
         </p:txBody>
       </p:sp>
@@ -7419,6 +7161,10 @@
           </a:solidFill>
           <a:ln/>
         </p:spPr>
+        <p:txBody>
+          <a:bodyPr/>
+          <a:p/>
+        </p:txBody>
       </p:sp>
       <p:sp>
         <p:nvSpPr>
@@ -7517,6 +7263,10 @@
           </a:solidFill>
           <a:ln/>
         </p:spPr>
+        <p:txBody>
+          <a:bodyPr/>
+          <a:p/>
+        </p:txBody>
       </p:sp>
       <p:sp>
         <p:nvSpPr>
@@ -7615,6 +7365,10 @@
           </a:solidFill>
           <a:ln/>
         </p:spPr>
+        <p:txBody>
+          <a:bodyPr/>
+          <a:p/>
+        </p:txBody>
       </p:sp>
       <p:sp>
         <p:nvSpPr>
@@ -7713,6 +7467,10 @@
           </a:solidFill>
           <a:ln/>
         </p:spPr>
+        <p:txBody>
+          <a:bodyPr/>
+          <a:p/>
+        </p:txBody>
       </p:sp>
       <p:sp>
         <p:nvSpPr>
@@ -7811,6 +7569,10 @@
           </a:solidFill>
           <a:ln/>
         </p:spPr>
+        <p:txBody>
+          <a:bodyPr/>
+          <a:p/>
+        </p:txBody>
       </p:sp>
       <p:sp>
         <p:nvSpPr>
@@ -7909,6 +7671,10 @@
           </a:solidFill>
           <a:ln/>
         </p:spPr>
+        <p:txBody>
+          <a:bodyPr/>
+          <a:p/>
+        </p:txBody>
       </p:sp>
       <p:sp>
         <p:nvSpPr>
@@ -7990,79 +7756,44 @@
       </p:sp>
       <p:sp>
         <p:nvSpPr>
-          <p:cNvPr id="22" name="Text 20"/>
-          <p:cNvSpPr txBox="1"/>
-          <p:nvPr/>
-        </p:nvSpPr>
-        <p:spPr>
-          <a:xfrm>
-            <a:off x="640080" y="6446520"/>
-            <a:ext cx="8686800" cy="292608"/>
-          </a:xfrm>
-          <a:prstGeom prst="rect">
-            <a:avLst/>
-          </a:prstGeom>
-          <a:noFill/>
-          <a:ln/>
-        </p:spPr>
-        <p:txBody>
-          <a:bodyPr wrap="square" lIns="0" tIns="0" rIns="0" bIns="0" rtlCol="0" anchor="ctr"/>
-          <a:lstStyle/>
-          <a:p>
-            <a:pPr algn="l" indent="0" marL="0">
-              <a:buNone/>
-            </a:pPr>
-            <a:r>
-              <a:rPr lang="en-US" sz="900" dirty="0">
-                <a:solidFill>
-                  <a:srgbClr val="5D5D72"/>
-                </a:solidFill>
-                <a:latin typeface="Calibri" pitchFamily="34" charset="0"/>
-                <a:ea typeface="Calibri" pitchFamily="34" charset="-122"/>
-                <a:cs typeface="Calibri" pitchFamily="34" charset="-120"/>
-              </a:rPr>
-              <a:t>Usman Akram  •  COMSATS University Islamabad</a:t>
-            </a:r>
-            <a:endParaRPr lang="en-US" sz="900" dirty="0"/>
-          </a:p>
-        </p:txBody>
-      </p:sp>
-      <p:sp>
-        <p:nvSpPr>
-          <p:cNvPr id="23" name="Text 21"/>
-          <p:cNvSpPr txBox="1"/>
-          <p:nvPr/>
-        </p:nvSpPr>
-        <p:spPr>
-          <a:xfrm>
-            <a:off x="11155680" y="6446520"/>
-            <a:ext cx="457200" cy="292608"/>
-          </a:xfrm>
-          <a:prstGeom prst="rect">
-            <a:avLst/>
-          </a:prstGeom>
-          <a:noFill/>
-          <a:ln/>
-        </p:spPr>
-        <p:txBody>
-          <a:bodyPr wrap="square" lIns="0" tIns="0" rIns="0" bIns="0" rtlCol="0" anchor="ctr"/>
-          <a:lstStyle/>
-          <a:p>
-            <a:pPr algn="r" indent="0" marL="0">
-              <a:buNone/>
-            </a:pPr>
-            <a:r>
-              <a:rPr lang="en-US" sz="900" dirty="0">
-                <a:solidFill>
-                  <a:srgbClr val="5D5D72"/>
-                </a:solidFill>
-                <a:latin typeface="Calibri" pitchFamily="34" charset="0"/>
-                <a:ea typeface="Calibri" pitchFamily="34" charset="-122"/>
-                <a:cs typeface="Calibri" pitchFamily="34" charset="-120"/>
-              </a:rPr>
-              <a:t>2</a:t>
-            </a:r>
-            <a:endParaRPr lang="en-US" sz="900" dirty="0"/>
+          <p:cNvPr id="24" name="cuinotes-footer-mark"/>
+          <p:cNvSpPr txBox="1"/>
+          <p:nvPr/>
+        </p:nvSpPr>
+        <p:spPr>
+          <a:xfrm>
+            <a:off x="9951720" y="6455664"/>
+            <a:ext cx="2011680" cy="292608"/>
+          </a:xfrm>
+          <a:prstGeom prst="rect">
+            <a:avLst/>
+          </a:prstGeom>
+          <a:noFill/>
+        </p:spPr>
+        <p:txBody>
+          <a:bodyPr wrap="none" lIns="0" rIns="0" tIns="0" bIns="0">
+            <a:spAutoFit/>
+          </a:bodyPr>
+          <a:lstStyle/>
+          <a:p>
+            <a:pPr algn="r"/>
+            <a:r>
+              <a:rPr sz="1000">
+                <a:solidFill>
+                  <a:srgbClr val="8A939B"/>
+                </a:solidFill>
+                <a:hlinkClick r:id="rId3"/>
+              </a:rPr>
+              <a:t>cuinotes.com</a:t>
+            </a:r>
+            <a:r>
+              <a:rPr sz="1000">
+                <a:solidFill>
+                  <a:srgbClr val="8A939B"/>
+                </a:solidFill>
+              </a:rPr>
+              <a:t>  ·  2</a:t>
+            </a:r>
           </a:p>
         </p:txBody>
       </p:sp>
@@ -8241,6 +7972,10 @@
             <a:prstDash val="solid"/>
           </a:ln>
         </p:spPr>
+        <p:txBody>
+          <a:bodyPr/>
+          <a:p/>
+        </p:txBody>
       </p:sp>
       <p:sp>
         <p:nvSpPr>
@@ -8392,6 +8127,10 @@
             <a:prstDash val="solid"/>
           </a:ln>
         </p:spPr>
+        <p:txBody>
+          <a:bodyPr/>
+          <a:p/>
+        </p:txBody>
       </p:sp>
       <p:sp>
         <p:nvSpPr>
@@ -8519,79 +8258,44 @@
       </p:sp>
       <p:sp>
         <p:nvSpPr>
-          <p:cNvPr id="11" name="Text 9"/>
-          <p:cNvSpPr txBox="1"/>
-          <p:nvPr/>
-        </p:nvSpPr>
-        <p:spPr>
-          <a:xfrm>
-            <a:off x="640080" y="6446520"/>
-            <a:ext cx="8686800" cy="292608"/>
-          </a:xfrm>
-          <a:prstGeom prst="rect">
-            <a:avLst/>
-          </a:prstGeom>
-          <a:noFill/>
-          <a:ln/>
-        </p:spPr>
-        <p:txBody>
-          <a:bodyPr wrap="square" lIns="0" tIns="0" rIns="0" bIns="0" rtlCol="0" anchor="ctr"/>
-          <a:lstStyle/>
-          <a:p>
-            <a:pPr algn="l" indent="0" marL="0">
-              <a:buNone/>
-            </a:pPr>
-            <a:r>
-              <a:rPr lang="en-US" sz="900" dirty="0">
-                <a:solidFill>
-                  <a:srgbClr val="5D5D72"/>
-                </a:solidFill>
-                <a:latin typeface="Calibri" pitchFamily="34" charset="0"/>
-                <a:ea typeface="Calibri" pitchFamily="34" charset="-122"/>
-                <a:cs typeface="Calibri" pitchFamily="34" charset="-120"/>
-              </a:rPr>
-              <a:t>Usman Akram  •  COMSATS University Islamabad</a:t>
-            </a:r>
-            <a:endParaRPr lang="en-US" sz="900" dirty="0"/>
-          </a:p>
-        </p:txBody>
-      </p:sp>
-      <p:sp>
-        <p:nvSpPr>
-          <p:cNvPr id="12" name="Text 10"/>
-          <p:cNvSpPr txBox="1"/>
-          <p:nvPr/>
-        </p:nvSpPr>
-        <p:spPr>
-          <a:xfrm>
-            <a:off x="11155680" y="6446520"/>
-            <a:ext cx="457200" cy="292608"/>
-          </a:xfrm>
-          <a:prstGeom prst="rect">
-            <a:avLst/>
-          </a:prstGeom>
-          <a:noFill/>
-          <a:ln/>
-        </p:spPr>
-        <p:txBody>
-          <a:bodyPr wrap="square" lIns="0" tIns="0" rIns="0" bIns="0" rtlCol="0" anchor="ctr"/>
-          <a:lstStyle/>
-          <a:p>
-            <a:pPr algn="r" indent="0" marL="0">
-              <a:buNone/>
-            </a:pPr>
-            <a:r>
-              <a:rPr lang="en-US" sz="900" dirty="0">
-                <a:solidFill>
-                  <a:srgbClr val="5D5D72"/>
-                </a:solidFill>
-                <a:latin typeface="Calibri" pitchFamily="34" charset="0"/>
-                <a:ea typeface="Calibri" pitchFamily="34" charset="-122"/>
-                <a:cs typeface="Calibri" pitchFamily="34" charset="-120"/>
-              </a:rPr>
-              <a:t>3</a:t>
-            </a:r>
-            <a:endParaRPr lang="en-US" sz="900" dirty="0"/>
+          <p:cNvPr id="13" name="cuinotes-footer-mark"/>
+          <p:cNvSpPr txBox="1"/>
+          <p:nvPr/>
+        </p:nvSpPr>
+        <p:spPr>
+          <a:xfrm>
+            <a:off x="9951720" y="6455664"/>
+            <a:ext cx="2011680" cy="292608"/>
+          </a:xfrm>
+          <a:prstGeom prst="rect">
+            <a:avLst/>
+          </a:prstGeom>
+          <a:noFill/>
+        </p:spPr>
+        <p:txBody>
+          <a:bodyPr wrap="none" lIns="0" rIns="0" tIns="0" bIns="0">
+            <a:spAutoFit/>
+          </a:bodyPr>
+          <a:lstStyle/>
+          <a:p>
+            <a:pPr algn="r"/>
+            <a:r>
+              <a:rPr sz="1000">
+                <a:solidFill>
+                  <a:srgbClr val="8A939B"/>
+                </a:solidFill>
+                <a:hlinkClick r:id="rId3"/>
+              </a:rPr>
+              <a:t>cuinotes.com</a:t>
+            </a:r>
+            <a:r>
+              <a:rPr sz="1000">
+                <a:solidFill>
+                  <a:srgbClr val="8A939B"/>
+                </a:solidFill>
+              </a:rPr>
+              <a:t>  ·  3</a:t>
+            </a:r>
           </a:p>
         </p:txBody>
       </p:sp>
@@ -8726,6 +8430,10 @@
           </a:solidFill>
           <a:ln/>
         </p:spPr>
+        <p:txBody>
+          <a:bodyPr/>
+          <a:p/>
+        </p:txBody>
       </p:sp>
       <p:sp>
         <p:nvSpPr>
@@ -8789,6 +8497,10 @@
             <a:tailEnd type="triangle"/>
           </a:ln>
         </p:spPr>
+        <p:txBody>
+          <a:bodyPr/>
+          <a:p/>
+        </p:txBody>
       </p:sp>
       <p:sp>
         <p:nvSpPr>
@@ -8811,6 +8523,10 @@
           </a:solidFill>
           <a:ln/>
         </p:spPr>
+        <p:txBody>
+          <a:bodyPr/>
+          <a:p/>
+        </p:txBody>
       </p:sp>
       <p:sp>
         <p:nvSpPr>
@@ -8892,79 +8608,44 @@
       </p:sp>
       <p:sp>
         <p:nvSpPr>
-          <p:cNvPr id="10" name="Text 8"/>
-          <p:cNvSpPr txBox="1"/>
-          <p:nvPr/>
-        </p:nvSpPr>
-        <p:spPr>
-          <a:xfrm>
-            <a:off x="640080" y="6446520"/>
-            <a:ext cx="8686800" cy="292608"/>
-          </a:xfrm>
-          <a:prstGeom prst="rect">
-            <a:avLst/>
-          </a:prstGeom>
-          <a:noFill/>
-          <a:ln/>
-        </p:spPr>
-        <p:txBody>
-          <a:bodyPr wrap="square" lIns="0" tIns="0" rIns="0" bIns="0" rtlCol="0" anchor="ctr"/>
-          <a:lstStyle/>
-          <a:p>
-            <a:pPr algn="l" indent="0" marL="0">
-              <a:buNone/>
-            </a:pPr>
-            <a:r>
-              <a:rPr lang="en-US" sz="900" dirty="0">
-                <a:solidFill>
-                  <a:srgbClr val="5D5D72"/>
-                </a:solidFill>
-                <a:latin typeface="Calibri" pitchFamily="34" charset="0"/>
-                <a:ea typeface="Calibri" pitchFamily="34" charset="-122"/>
-                <a:cs typeface="Calibri" pitchFamily="34" charset="-120"/>
-              </a:rPr>
-              <a:t>Usman Akram  •  COMSATS University Islamabad</a:t>
-            </a:r>
-            <a:endParaRPr lang="en-US" sz="900" dirty="0"/>
-          </a:p>
-        </p:txBody>
-      </p:sp>
-      <p:sp>
-        <p:nvSpPr>
-          <p:cNvPr id="11" name="Text 9"/>
-          <p:cNvSpPr txBox="1"/>
-          <p:nvPr/>
-        </p:nvSpPr>
-        <p:spPr>
-          <a:xfrm>
-            <a:off x="11155680" y="6446520"/>
-            <a:ext cx="457200" cy="292608"/>
-          </a:xfrm>
-          <a:prstGeom prst="rect">
-            <a:avLst/>
-          </a:prstGeom>
-          <a:noFill/>
-          <a:ln/>
-        </p:spPr>
-        <p:txBody>
-          <a:bodyPr wrap="square" lIns="0" tIns="0" rIns="0" bIns="0" rtlCol="0" anchor="ctr"/>
-          <a:lstStyle/>
-          <a:p>
-            <a:pPr algn="r" indent="0" marL="0">
-              <a:buNone/>
-            </a:pPr>
-            <a:r>
-              <a:rPr lang="en-US" sz="900" dirty="0">
-                <a:solidFill>
-                  <a:srgbClr val="5D5D72"/>
-                </a:solidFill>
-                <a:latin typeface="Calibri" pitchFamily="34" charset="0"/>
-                <a:ea typeface="Calibri" pitchFamily="34" charset="-122"/>
-                <a:cs typeface="Calibri" pitchFamily="34" charset="-120"/>
-              </a:rPr>
-              <a:t>4</a:t>
-            </a:r>
-            <a:endParaRPr lang="en-US" sz="900" dirty="0"/>
+          <p:cNvPr id="12" name="cuinotes-footer-mark"/>
+          <p:cNvSpPr txBox="1"/>
+          <p:nvPr/>
+        </p:nvSpPr>
+        <p:spPr>
+          <a:xfrm>
+            <a:off x="9951720" y="6455664"/>
+            <a:ext cx="2011680" cy="292608"/>
+          </a:xfrm>
+          <a:prstGeom prst="rect">
+            <a:avLst/>
+          </a:prstGeom>
+          <a:noFill/>
+        </p:spPr>
+        <p:txBody>
+          <a:bodyPr wrap="none" lIns="0" rIns="0" tIns="0" bIns="0">
+            <a:spAutoFit/>
+          </a:bodyPr>
+          <a:lstStyle/>
+          <a:p>
+            <a:pPr algn="r"/>
+            <a:r>
+              <a:rPr sz="1000">
+                <a:solidFill>
+                  <a:srgbClr val="8A939B"/>
+                </a:solidFill>
+                <a:hlinkClick r:id="rId3"/>
+              </a:rPr>
+              <a:t>cuinotes.com</a:t>
+            </a:r>
+            <a:r>
+              <a:rPr sz="1000">
+                <a:solidFill>
+                  <a:srgbClr val="8A939B"/>
+                </a:solidFill>
+              </a:rPr>
+              <a:t>  ·  4</a:t>
+            </a:r>
           </a:p>
         </p:txBody>
       </p:sp>
@@ -9099,6 +8780,10 @@
           </a:solidFill>
           <a:ln/>
         </p:spPr>
+        <p:txBody>
+          <a:bodyPr/>
+          <a:p/>
+        </p:txBody>
       </p:sp>
       <p:sp>
         <p:nvSpPr>
@@ -9201,6 +8886,10 @@
             <a:tailEnd type="triangle"/>
           </a:ln>
         </p:spPr>
+        <p:txBody>
+          <a:bodyPr/>
+          <a:p/>
+        </p:txBody>
       </p:sp>
       <p:sp>
         <p:nvSpPr>
@@ -9223,6 +8912,10 @@
           </a:solidFill>
           <a:ln/>
         </p:spPr>
+        <p:txBody>
+          <a:bodyPr/>
+          <a:p/>
+        </p:txBody>
       </p:sp>
       <p:sp>
         <p:nvSpPr>
@@ -9325,6 +9018,10 @@
             <a:tailEnd type="triangle"/>
           </a:ln>
         </p:spPr>
+        <p:txBody>
+          <a:bodyPr/>
+          <a:p/>
+        </p:txBody>
       </p:sp>
       <p:sp>
         <p:nvSpPr>
@@ -9347,6 +9044,10 @@
           </a:solidFill>
           <a:ln/>
         </p:spPr>
+        <p:txBody>
+          <a:bodyPr/>
+          <a:p/>
+        </p:txBody>
       </p:sp>
       <p:sp>
         <p:nvSpPr>
@@ -9428,79 +9129,44 @@
       </p:sp>
       <p:sp>
         <p:nvSpPr>
-          <p:cNvPr id="15" name="Text 13"/>
-          <p:cNvSpPr txBox="1"/>
-          <p:nvPr/>
-        </p:nvSpPr>
-        <p:spPr>
-          <a:xfrm>
-            <a:off x="640080" y="6446520"/>
-            <a:ext cx="8686800" cy="292608"/>
-          </a:xfrm>
-          <a:prstGeom prst="rect">
-            <a:avLst/>
-          </a:prstGeom>
-          <a:noFill/>
-          <a:ln/>
-        </p:spPr>
-        <p:txBody>
-          <a:bodyPr wrap="square" lIns="0" tIns="0" rIns="0" bIns="0" rtlCol="0" anchor="ctr"/>
-          <a:lstStyle/>
-          <a:p>
-            <a:pPr algn="l" indent="0" marL="0">
-              <a:buNone/>
-            </a:pPr>
-            <a:r>
-              <a:rPr lang="en-US" sz="900" dirty="0">
-                <a:solidFill>
-                  <a:srgbClr val="5D5D72"/>
-                </a:solidFill>
-                <a:latin typeface="Calibri" pitchFamily="34" charset="0"/>
-                <a:ea typeface="Calibri" pitchFamily="34" charset="-122"/>
-                <a:cs typeface="Calibri" pitchFamily="34" charset="-120"/>
-              </a:rPr>
-              <a:t>Usman Akram  •  COMSATS University Islamabad</a:t>
-            </a:r>
-            <a:endParaRPr lang="en-US" sz="900" dirty="0"/>
-          </a:p>
-        </p:txBody>
-      </p:sp>
-      <p:sp>
-        <p:nvSpPr>
-          <p:cNvPr id="16" name="Text 14"/>
-          <p:cNvSpPr txBox="1"/>
-          <p:nvPr/>
-        </p:nvSpPr>
-        <p:spPr>
-          <a:xfrm>
-            <a:off x="11155680" y="6446520"/>
-            <a:ext cx="457200" cy="292608"/>
-          </a:xfrm>
-          <a:prstGeom prst="rect">
-            <a:avLst/>
-          </a:prstGeom>
-          <a:noFill/>
-          <a:ln/>
-        </p:spPr>
-        <p:txBody>
-          <a:bodyPr wrap="square" lIns="0" tIns="0" rIns="0" bIns="0" rtlCol="0" anchor="ctr"/>
-          <a:lstStyle/>
-          <a:p>
-            <a:pPr algn="r" indent="0" marL="0">
-              <a:buNone/>
-            </a:pPr>
-            <a:r>
-              <a:rPr lang="en-US" sz="900" dirty="0">
-                <a:solidFill>
-                  <a:srgbClr val="5D5D72"/>
-                </a:solidFill>
-                <a:latin typeface="Calibri" pitchFamily="34" charset="0"/>
-                <a:ea typeface="Calibri" pitchFamily="34" charset="-122"/>
-                <a:cs typeface="Calibri" pitchFamily="34" charset="-120"/>
-              </a:rPr>
-              <a:t>5</a:t>
-            </a:r>
-            <a:endParaRPr lang="en-US" sz="900" dirty="0"/>
+          <p:cNvPr id="17" name="cuinotes-footer-mark"/>
+          <p:cNvSpPr txBox="1"/>
+          <p:nvPr/>
+        </p:nvSpPr>
+        <p:spPr>
+          <a:xfrm>
+            <a:off x="9951720" y="6455664"/>
+            <a:ext cx="2011680" cy="292608"/>
+          </a:xfrm>
+          <a:prstGeom prst="rect">
+            <a:avLst/>
+          </a:prstGeom>
+          <a:noFill/>
+        </p:spPr>
+        <p:txBody>
+          <a:bodyPr wrap="none" lIns="0" rIns="0" tIns="0" bIns="0">
+            <a:spAutoFit/>
+          </a:bodyPr>
+          <a:lstStyle/>
+          <a:p>
+            <a:pPr algn="r"/>
+            <a:r>
+              <a:rPr sz="1000">
+                <a:solidFill>
+                  <a:srgbClr val="8A939B"/>
+                </a:solidFill>
+                <a:hlinkClick r:id="rId3"/>
+              </a:rPr>
+              <a:t>cuinotes.com</a:t>
+            </a:r>
+            <a:r>
+              <a:rPr sz="1000">
+                <a:solidFill>
+                  <a:srgbClr val="8A939B"/>
+                </a:solidFill>
+              </a:rPr>
+              <a:t>  ·  5</a:t>
+            </a:r>
           </a:p>
         </p:txBody>
       </p:sp>
@@ -9640,6 +9306,10 @@
             <a:prstDash val="solid"/>
           </a:ln>
         </p:spPr>
+        <p:txBody>
+          <a:bodyPr/>
+          <a:p/>
+        </p:txBody>
       </p:sp>
       <p:sp>
         <p:nvSpPr>
@@ -9721,79 +9391,44 @@
       </p:sp>
       <p:sp>
         <p:nvSpPr>
-          <p:cNvPr id="7" name="Text 5"/>
-          <p:cNvSpPr txBox="1"/>
-          <p:nvPr/>
-        </p:nvSpPr>
-        <p:spPr>
-          <a:xfrm>
-            <a:off x="640080" y="6446520"/>
-            <a:ext cx="8686800" cy="292608"/>
-          </a:xfrm>
-          <a:prstGeom prst="rect">
-            <a:avLst/>
-          </a:prstGeom>
-          <a:noFill/>
-          <a:ln/>
-        </p:spPr>
-        <p:txBody>
-          <a:bodyPr wrap="square" lIns="0" tIns="0" rIns="0" bIns="0" rtlCol="0" anchor="ctr"/>
-          <a:lstStyle/>
-          <a:p>
-            <a:pPr algn="l" indent="0" marL="0">
-              <a:buNone/>
-            </a:pPr>
-            <a:r>
-              <a:rPr lang="en-US" sz="900" dirty="0">
-                <a:solidFill>
-                  <a:srgbClr val="5D5D72"/>
-                </a:solidFill>
-                <a:latin typeface="Calibri" pitchFamily="34" charset="0"/>
-                <a:ea typeface="Calibri" pitchFamily="34" charset="-122"/>
-                <a:cs typeface="Calibri" pitchFamily="34" charset="-120"/>
-              </a:rPr>
-              <a:t>Usman Akram  •  COMSATS University Islamabad</a:t>
-            </a:r>
-            <a:endParaRPr lang="en-US" sz="900" dirty="0"/>
-          </a:p>
-        </p:txBody>
-      </p:sp>
-      <p:sp>
-        <p:nvSpPr>
-          <p:cNvPr id="8" name="Text 6"/>
-          <p:cNvSpPr txBox="1"/>
-          <p:nvPr/>
-        </p:nvSpPr>
-        <p:spPr>
-          <a:xfrm>
-            <a:off x="11155680" y="6446520"/>
-            <a:ext cx="457200" cy="292608"/>
-          </a:xfrm>
-          <a:prstGeom prst="rect">
-            <a:avLst/>
-          </a:prstGeom>
-          <a:noFill/>
-          <a:ln/>
-        </p:spPr>
-        <p:txBody>
-          <a:bodyPr wrap="square" lIns="0" tIns="0" rIns="0" bIns="0" rtlCol="0" anchor="ctr"/>
-          <a:lstStyle/>
-          <a:p>
-            <a:pPr algn="r" indent="0" marL="0">
-              <a:buNone/>
-            </a:pPr>
-            <a:r>
-              <a:rPr lang="en-US" sz="900" dirty="0">
-                <a:solidFill>
-                  <a:srgbClr val="5D5D72"/>
-                </a:solidFill>
-                <a:latin typeface="Calibri" pitchFamily="34" charset="0"/>
-                <a:ea typeface="Calibri" pitchFamily="34" charset="-122"/>
-                <a:cs typeface="Calibri" pitchFamily="34" charset="-120"/>
-              </a:rPr>
-              <a:t>6</a:t>
-            </a:r>
-            <a:endParaRPr lang="en-US" sz="900" dirty="0"/>
+          <p:cNvPr id="9" name="cuinotes-footer-mark"/>
+          <p:cNvSpPr txBox="1"/>
+          <p:nvPr/>
+        </p:nvSpPr>
+        <p:spPr>
+          <a:xfrm>
+            <a:off x="9951720" y="6455664"/>
+            <a:ext cx="2011680" cy="292608"/>
+          </a:xfrm>
+          <a:prstGeom prst="rect">
+            <a:avLst/>
+          </a:prstGeom>
+          <a:noFill/>
+        </p:spPr>
+        <p:txBody>
+          <a:bodyPr wrap="none" lIns="0" rIns="0" tIns="0" bIns="0">
+            <a:spAutoFit/>
+          </a:bodyPr>
+          <a:lstStyle/>
+          <a:p>
+            <a:pPr algn="r"/>
+            <a:r>
+              <a:rPr sz="1000">
+                <a:solidFill>
+                  <a:srgbClr val="8A939B"/>
+                </a:solidFill>
+                <a:hlinkClick r:id="rId3"/>
+              </a:rPr>
+              <a:t>cuinotes.com</a:t>
+            </a:r>
+            <a:r>
+              <a:rPr sz="1000">
+                <a:solidFill>
+                  <a:srgbClr val="8A939B"/>
+                </a:solidFill>
+              </a:rPr>
+              <a:t>  ·  6</a:t>
+            </a:r>
           </a:p>
         </p:txBody>
       </p:sp>
@@ -9926,6 +9561,10 @@
           </a:solidFill>
           <a:ln/>
         </p:spPr>
+        <p:txBody>
+          <a:bodyPr/>
+          <a:p/>
+        </p:txBody>
       </p:sp>
       <p:sp>
         <p:nvSpPr>
@@ -9985,6 +9624,10 @@
           </a:solidFill>
           <a:ln/>
         </p:spPr>
+        <p:txBody>
+          <a:bodyPr/>
+          <a:p/>
+        </p:txBody>
       </p:sp>
       <p:sp>
         <p:nvSpPr>
@@ -10044,6 +9687,10 @@
           </a:solidFill>
           <a:ln/>
         </p:spPr>
+        <p:txBody>
+          <a:bodyPr/>
+          <a:p/>
+        </p:txBody>
       </p:sp>
       <p:sp>
         <p:nvSpPr>
@@ -10086,79 +9733,44 @@
       </p:sp>
       <p:sp>
         <p:nvSpPr>
-          <p:cNvPr id="10" name="Text 8"/>
-          <p:cNvSpPr txBox="1"/>
-          <p:nvPr/>
-        </p:nvSpPr>
-        <p:spPr>
-          <a:xfrm>
-            <a:off x="640080" y="6446520"/>
-            <a:ext cx="8686800" cy="292608"/>
-          </a:xfrm>
-          <a:prstGeom prst="rect">
-            <a:avLst/>
-          </a:prstGeom>
-          <a:noFill/>
-          <a:ln/>
-        </p:spPr>
-        <p:txBody>
-          <a:bodyPr wrap="square" lIns="0" tIns="0" rIns="0" bIns="0" rtlCol="0" anchor="ctr"/>
-          <a:lstStyle/>
-          <a:p>
-            <a:pPr algn="l" indent="0" marL="0">
-              <a:buNone/>
-            </a:pPr>
-            <a:r>
-              <a:rPr lang="en-US" sz="900" dirty="0">
-                <a:solidFill>
-                  <a:srgbClr val="5D5D72"/>
-                </a:solidFill>
-                <a:latin typeface="Calibri" pitchFamily="34" charset="0"/>
-                <a:ea typeface="Calibri" pitchFamily="34" charset="-122"/>
-                <a:cs typeface="Calibri" pitchFamily="34" charset="-120"/>
-              </a:rPr>
-              <a:t>Usman Akram  •  COMSATS University Islamabad</a:t>
-            </a:r>
-            <a:endParaRPr lang="en-US" sz="900" dirty="0"/>
-          </a:p>
-        </p:txBody>
-      </p:sp>
-      <p:sp>
-        <p:nvSpPr>
-          <p:cNvPr id="11" name="Text 9"/>
-          <p:cNvSpPr txBox="1"/>
-          <p:nvPr/>
-        </p:nvSpPr>
-        <p:spPr>
-          <a:xfrm>
-            <a:off x="11155680" y="6446520"/>
-            <a:ext cx="457200" cy="292608"/>
-          </a:xfrm>
-          <a:prstGeom prst="rect">
-            <a:avLst/>
-          </a:prstGeom>
-          <a:noFill/>
-          <a:ln/>
-        </p:spPr>
-        <p:txBody>
-          <a:bodyPr wrap="square" lIns="0" tIns="0" rIns="0" bIns="0" rtlCol="0" anchor="ctr"/>
-          <a:lstStyle/>
-          <a:p>
-            <a:pPr algn="r" indent="0" marL="0">
-              <a:buNone/>
-            </a:pPr>
-            <a:r>
-              <a:rPr lang="en-US" sz="900" dirty="0">
-                <a:solidFill>
-                  <a:srgbClr val="5D5D72"/>
-                </a:solidFill>
-                <a:latin typeface="Calibri" pitchFamily="34" charset="0"/>
-                <a:ea typeface="Calibri" pitchFamily="34" charset="-122"/>
-                <a:cs typeface="Calibri" pitchFamily="34" charset="-120"/>
-              </a:rPr>
-              <a:t>7</a:t>
-            </a:r>
-            <a:endParaRPr lang="en-US" sz="900" dirty="0"/>
+          <p:cNvPr id="12" name="cuinotes-footer-mark"/>
+          <p:cNvSpPr txBox="1"/>
+          <p:nvPr/>
+        </p:nvSpPr>
+        <p:spPr>
+          <a:xfrm>
+            <a:off x="9951720" y="6455664"/>
+            <a:ext cx="2011680" cy="292608"/>
+          </a:xfrm>
+          <a:prstGeom prst="rect">
+            <a:avLst/>
+          </a:prstGeom>
+          <a:noFill/>
+        </p:spPr>
+        <p:txBody>
+          <a:bodyPr wrap="none" lIns="0" rIns="0" tIns="0" bIns="0">
+            <a:spAutoFit/>
+          </a:bodyPr>
+          <a:lstStyle/>
+          <a:p>
+            <a:pPr algn="r"/>
+            <a:r>
+              <a:rPr sz="1000">
+                <a:solidFill>
+                  <a:srgbClr val="8A939B"/>
+                </a:solidFill>
+                <a:hlinkClick r:id="rId3"/>
+              </a:rPr>
+              <a:t>cuinotes.com</a:t>
+            </a:r>
+            <a:r>
+              <a:rPr sz="1000">
+                <a:solidFill>
+                  <a:srgbClr val="8A939B"/>
+                </a:solidFill>
+              </a:rPr>
+              <a:t>  ·  7</a:t>
+            </a:r>
           </a:p>
         </p:txBody>
       </p:sp>
@@ -10293,6 +9905,10 @@
           </a:solidFill>
           <a:ln/>
         </p:spPr>
+        <p:txBody>
+          <a:bodyPr/>
+          <a:p/>
+        </p:txBody>
       </p:sp>
       <p:sp>
         <p:nvSpPr>
@@ -10437,79 +10053,44 @@
       </p:sp>
       <p:sp>
         <p:nvSpPr>
-          <p:cNvPr id="7" name="Text 5"/>
-          <p:cNvSpPr txBox="1"/>
-          <p:nvPr/>
-        </p:nvSpPr>
-        <p:spPr>
-          <a:xfrm>
-            <a:off x="640080" y="6446520"/>
-            <a:ext cx="8686800" cy="292608"/>
-          </a:xfrm>
-          <a:prstGeom prst="rect">
-            <a:avLst/>
-          </a:prstGeom>
-          <a:noFill/>
-          <a:ln/>
-        </p:spPr>
-        <p:txBody>
-          <a:bodyPr wrap="square" lIns="0" tIns="0" rIns="0" bIns="0" rtlCol="0" anchor="ctr"/>
-          <a:lstStyle/>
-          <a:p>
-            <a:pPr algn="l" indent="0" marL="0">
-              <a:buNone/>
-            </a:pPr>
-            <a:r>
-              <a:rPr lang="en-US" sz="900" dirty="0">
-                <a:solidFill>
-                  <a:srgbClr val="5D5D72"/>
-                </a:solidFill>
-                <a:latin typeface="Calibri" pitchFamily="34" charset="0"/>
-                <a:ea typeface="Calibri" pitchFamily="34" charset="-122"/>
-                <a:cs typeface="Calibri" pitchFamily="34" charset="-120"/>
-              </a:rPr>
-              <a:t>Usman Akram  •  COMSATS University Islamabad</a:t>
-            </a:r>
-            <a:endParaRPr lang="en-US" sz="900" dirty="0"/>
-          </a:p>
-        </p:txBody>
-      </p:sp>
-      <p:sp>
-        <p:nvSpPr>
-          <p:cNvPr id="8" name="Text 6"/>
-          <p:cNvSpPr txBox="1"/>
-          <p:nvPr/>
-        </p:nvSpPr>
-        <p:spPr>
-          <a:xfrm>
-            <a:off x="11155680" y="6446520"/>
-            <a:ext cx="457200" cy="292608"/>
-          </a:xfrm>
-          <a:prstGeom prst="rect">
-            <a:avLst/>
-          </a:prstGeom>
-          <a:noFill/>
-          <a:ln/>
-        </p:spPr>
-        <p:txBody>
-          <a:bodyPr wrap="square" lIns="0" tIns="0" rIns="0" bIns="0" rtlCol="0" anchor="ctr"/>
-          <a:lstStyle/>
-          <a:p>
-            <a:pPr algn="r" indent="0" marL="0">
-              <a:buNone/>
-            </a:pPr>
-            <a:r>
-              <a:rPr lang="en-US" sz="900" dirty="0">
-                <a:solidFill>
-                  <a:srgbClr val="5D5D72"/>
-                </a:solidFill>
-                <a:latin typeface="Calibri" pitchFamily="34" charset="0"/>
-                <a:ea typeface="Calibri" pitchFamily="34" charset="-122"/>
-                <a:cs typeface="Calibri" pitchFamily="34" charset="-120"/>
-              </a:rPr>
-              <a:t>8</a:t>
-            </a:r>
-            <a:endParaRPr lang="en-US" sz="900" dirty="0"/>
+          <p:cNvPr id="9" name="cuinotes-footer-mark"/>
+          <p:cNvSpPr txBox="1"/>
+          <p:nvPr/>
+        </p:nvSpPr>
+        <p:spPr>
+          <a:xfrm>
+            <a:off x="9951720" y="6455664"/>
+            <a:ext cx="2011680" cy="292608"/>
+          </a:xfrm>
+          <a:prstGeom prst="rect">
+            <a:avLst/>
+          </a:prstGeom>
+          <a:noFill/>
+        </p:spPr>
+        <p:txBody>
+          <a:bodyPr wrap="none" lIns="0" rIns="0" tIns="0" bIns="0">
+            <a:spAutoFit/>
+          </a:bodyPr>
+          <a:lstStyle/>
+          <a:p>
+            <a:pPr algn="r"/>
+            <a:r>
+              <a:rPr sz="1000">
+                <a:solidFill>
+                  <a:srgbClr val="8A939B"/>
+                </a:solidFill>
+                <a:hlinkClick r:id="rId3"/>
+              </a:rPr>
+              <a:t>cuinotes.com</a:t>
+            </a:r>
+            <a:r>
+              <a:rPr sz="1000">
+                <a:solidFill>
+                  <a:srgbClr val="8A939B"/>
+                </a:solidFill>
+              </a:rPr>
+              <a:t>  ·  8</a:t>
+            </a:r>
           </a:p>
         </p:txBody>
       </p:sp>
@@ -10644,6 +10225,10 @@
           </a:solidFill>
           <a:ln/>
         </p:spPr>
+        <p:txBody>
+          <a:bodyPr/>
+          <a:p/>
+        </p:txBody>
       </p:sp>
       <p:sp>
         <p:nvSpPr>
@@ -10707,6 +10292,10 @@
             <a:tailEnd type="triangle"/>
           </a:ln>
         </p:spPr>
+        <p:txBody>
+          <a:bodyPr/>
+          <a:p/>
+        </p:txBody>
       </p:sp>
       <p:sp>
         <p:nvSpPr>
@@ -10729,6 +10318,10 @@
           </a:solidFill>
           <a:ln/>
         </p:spPr>
+        <p:txBody>
+          <a:bodyPr/>
+          <a:p/>
+        </p:txBody>
       </p:sp>
       <p:sp>
         <p:nvSpPr>
@@ -10810,79 +10403,44 @@
       </p:sp>
       <p:sp>
         <p:nvSpPr>
-          <p:cNvPr id="10" name="Text 8"/>
-          <p:cNvSpPr txBox="1"/>
-          <p:nvPr/>
-        </p:nvSpPr>
-        <p:spPr>
-          <a:xfrm>
-            <a:off x="640080" y="6446520"/>
-            <a:ext cx="8686800" cy="292608"/>
-          </a:xfrm>
-          <a:prstGeom prst="rect">
-            <a:avLst/>
-          </a:prstGeom>
-          <a:noFill/>
-          <a:ln/>
-        </p:spPr>
-        <p:txBody>
-          <a:bodyPr wrap="square" lIns="0" tIns="0" rIns="0" bIns="0" rtlCol="0" anchor="ctr"/>
-          <a:lstStyle/>
-          <a:p>
-            <a:pPr algn="l" indent="0" marL="0">
-              <a:buNone/>
-            </a:pPr>
-            <a:r>
-              <a:rPr lang="en-US" sz="900" dirty="0">
-                <a:solidFill>
-                  <a:srgbClr val="5D5D72"/>
-                </a:solidFill>
-                <a:latin typeface="Calibri" pitchFamily="34" charset="0"/>
-                <a:ea typeface="Calibri" pitchFamily="34" charset="-122"/>
-                <a:cs typeface="Calibri" pitchFamily="34" charset="-120"/>
-              </a:rPr>
-              <a:t>Usman Akram  •  COMSATS University Islamabad</a:t>
-            </a:r>
-            <a:endParaRPr lang="en-US" sz="900" dirty="0"/>
-          </a:p>
-        </p:txBody>
-      </p:sp>
-      <p:sp>
-        <p:nvSpPr>
-          <p:cNvPr id="11" name="Text 9"/>
-          <p:cNvSpPr txBox="1"/>
-          <p:nvPr/>
-        </p:nvSpPr>
-        <p:spPr>
-          <a:xfrm>
-            <a:off x="11155680" y="6446520"/>
-            <a:ext cx="457200" cy="292608"/>
-          </a:xfrm>
-          <a:prstGeom prst="rect">
-            <a:avLst/>
-          </a:prstGeom>
-          <a:noFill/>
-          <a:ln/>
-        </p:spPr>
-        <p:txBody>
-          <a:bodyPr wrap="square" lIns="0" tIns="0" rIns="0" bIns="0" rtlCol="0" anchor="ctr"/>
-          <a:lstStyle/>
-          <a:p>
-            <a:pPr algn="r" indent="0" marL="0">
-              <a:buNone/>
-            </a:pPr>
-            <a:r>
-              <a:rPr lang="en-US" sz="900" dirty="0">
-                <a:solidFill>
-                  <a:srgbClr val="5D5D72"/>
-                </a:solidFill>
-                <a:latin typeface="Calibri" pitchFamily="34" charset="0"/>
-                <a:ea typeface="Calibri" pitchFamily="34" charset="-122"/>
-                <a:cs typeface="Calibri" pitchFamily="34" charset="-120"/>
-              </a:rPr>
-              <a:t>9</a:t>
-            </a:r>
-            <a:endParaRPr lang="en-US" sz="900" dirty="0"/>
+          <p:cNvPr id="12" name="cuinotes-footer-mark"/>
+          <p:cNvSpPr txBox="1"/>
+          <p:nvPr/>
+        </p:nvSpPr>
+        <p:spPr>
+          <a:xfrm>
+            <a:off x="9951720" y="6455664"/>
+            <a:ext cx="2011680" cy="292608"/>
+          </a:xfrm>
+          <a:prstGeom prst="rect">
+            <a:avLst/>
+          </a:prstGeom>
+          <a:noFill/>
+        </p:spPr>
+        <p:txBody>
+          <a:bodyPr wrap="none" lIns="0" rIns="0" tIns="0" bIns="0">
+            <a:spAutoFit/>
+          </a:bodyPr>
+          <a:lstStyle/>
+          <a:p>
+            <a:pPr algn="r"/>
+            <a:r>
+              <a:rPr sz="1000">
+                <a:solidFill>
+                  <a:srgbClr val="8A939B"/>
+                </a:solidFill>
+                <a:hlinkClick r:id="rId3"/>
+              </a:rPr>
+              <a:t>cuinotes.com</a:t>
+            </a:r>
+            <a:r>
+              <a:rPr sz="1000">
+                <a:solidFill>
+                  <a:srgbClr val="8A939B"/>
+                </a:solidFill>
+              </a:rPr>
+              <a:t>  ·  9</a:t>
+            </a:r>
           </a:p>
         </p:txBody>
       </p:sp>

--- a/slides/CSC336-Lecture-02-Tiered-Web-Architecture.pptx
+++ b/slides/CSC336-Lecture-02-Tiered-Web-Architecture.pptx
@@ -5018,9 +5018,13 @@
             </a:avLst>
           </a:prstGeom>
           <a:solidFill>
-            <a:srgbClr val="1E1E4C"/>
+            <a:srgbClr val="F7F8F9"/>
           </a:solidFill>
-          <a:ln/>
+          <a:ln w="9525">
+            <a:solidFill>
+              <a:srgbClr val="D0D5DD"/>
+            </a:solidFill>
+          </a:ln>
         </p:spPr>
         <p:txBody>
           <a:bodyPr/>
@@ -5057,7 +5061,7 @@
             <a:r>
               <a:rPr lang="en-US" sz="1400" dirty="0">
                 <a:solidFill>
-                  <a:srgbClr val="C9D3F5"/>
+                  <a:srgbClr val="1F2429"/>
                 </a:solidFill>
                 <a:latin typeface="Courier New" pitchFamily="34" charset="0"/>
                 <a:ea typeface="Courier New" pitchFamily="34" charset="-122"/>
@@ -5077,7 +5081,7 @@
             <a:r>
               <a:rPr lang="en-US" sz="1400" dirty="0">
                 <a:solidFill>
-                  <a:srgbClr val="C9D3F5"/>
+                  <a:srgbClr val="1F2429"/>
                 </a:solidFill>
                 <a:latin typeface="Courier New" pitchFamily="34" charset="0"/>
                 <a:ea typeface="Courier New" pitchFamily="34" charset="-122"/>
@@ -5097,7 +5101,7 @@
             <a:r>
               <a:rPr lang="en-US" sz="1400" dirty="0">
                 <a:solidFill>
-                  <a:srgbClr val="C9D3F5"/>
+                  <a:srgbClr val="1F2429"/>
                 </a:solidFill>
                 <a:latin typeface="Courier New" pitchFamily="34" charset="0"/>
                 <a:ea typeface="Courier New" pitchFamily="34" charset="-122"/>
@@ -5117,7 +5121,7 @@
             <a:r>
               <a:rPr lang="en-US" sz="1400" dirty="0">
                 <a:solidFill>
-                  <a:srgbClr val="C9D3F5"/>
+                  <a:srgbClr val="1F2429"/>
                 </a:solidFill>
                 <a:latin typeface="Courier New" pitchFamily="34" charset="0"/>
                 <a:ea typeface="Courier New" pitchFamily="34" charset="-122"/>
@@ -5137,7 +5141,7 @@
             <a:r>
               <a:rPr lang="en-US" sz="1400" dirty="0">
                 <a:solidFill>
-                  <a:srgbClr val="C9D3F5"/>
+                  <a:srgbClr val="1F2429"/>
                 </a:solidFill>
                 <a:latin typeface="Courier New" pitchFamily="34" charset="0"/>
                 <a:ea typeface="Courier New" pitchFamily="34" charset="-122"/>
@@ -6124,7 +6128,7 @@
         <p:spPr>
           <a:xfrm>
             <a:off x="640080" y="1965960"/>
-            <a:ext cx="10911535" cy="1645920"/>
+            <a:ext cx="10911535" cy="3657600"/>
           </a:xfrm>
           <a:prstGeom prst="roundRect">
             <a:avLst>
@@ -6155,7 +6159,7 @@
         <p:spPr>
           <a:xfrm>
             <a:off x="868680" y="2103120"/>
-            <a:ext cx="10454335" cy="274320"/>
+            <a:ext cx="10454335" cy="400000"/>
           </a:xfrm>
           <a:prstGeom prst="rect">
             <a:avLst/>
@@ -6171,7 +6175,7 @@
               <a:buNone/>
             </a:pPr>
             <a:r>
-              <a:rPr lang="en-US" sz="1000" b="1" spc="200" kern="0" dirty="0">
+              <a:rPr lang="en-US" sz="1800" b="1" spc="200" kern="0" dirty="0">
                 <a:solidFill>
                   <a:srgbClr val="8A3A12"/>
                 </a:solidFill>
@@ -6181,7 +6185,7 @@
               </a:rPr>
               <a:t>WARNING</a:t>
             </a:r>
-            <a:endParaRPr lang="en-US" sz="1000" dirty="0"/>
+            <a:endParaRPr lang="en-US" sz="1800" dirty="0"/>
           </a:p>
         </p:txBody>
       </p:sp>
@@ -6193,24 +6197,24 @@
         </p:nvSpPr>
         <p:spPr>
           <a:xfrm>
-            <a:off x="868680" y="2404872"/>
-            <a:ext cx="10454335" cy="1051560"/>
-          </a:xfrm>
-          <a:prstGeom prst="rect">
-            <a:avLst/>
-          </a:prstGeom>
-          <a:noFill/>
-          <a:ln/>
-        </p:spPr>
-        <p:txBody>
-          <a:bodyPr wrap="square" lIns="0" tIns="0" rIns="0" bIns="0" rtlCol="0" anchor="t"/>
+            <a:off x="868680" y="2795960"/>
+            <a:ext cx="10454335" cy="2500000"/>
+          </a:xfrm>
+          <a:prstGeom prst="rect">
+            <a:avLst/>
+          </a:prstGeom>
+          <a:noFill/>
+          <a:ln/>
+        </p:spPr>
+        <p:txBody>
+          <a:bodyPr wrap="square" lIns="0" tIns="0" rIns="0" bIns="0" rtlCol="0" anchor="ctr"/>
           <a:lstStyle/>
           <a:p>
             <a:pPr indent="0" marL="0">
               <a:buNone/>
             </a:pPr>
             <a:r>
-              <a:rPr lang="en-US" sz="1250" dirty="0">
+              <a:rPr lang="en-US" sz="2800" dirty="0">
                 <a:solidFill>
                   <a:srgbClr val="26262F"/>
                 </a:solidFill>
@@ -6220,7 +6224,7 @@
               </a:rPr>
               <a:t>A three-tier setup for a small class project adds deployment overhead (multiple servers, network configuration) that isn't justified if the project will never need to scale. Match the architecture to the actual requirements, not to what sounds most impressive.</a:t>
             </a:r>
-            <a:endParaRPr lang="en-US" sz="1250" dirty="0"/>
+            <a:endParaRPr lang="en-US" sz="2800" dirty="0"/>
           </a:p>
         </p:txBody>
       </p:sp>
@@ -9289,7 +9293,7 @@
         <p:spPr>
           <a:xfrm>
             <a:off x="640080" y="1965960"/>
-            <a:ext cx="10911535" cy="1645920"/>
+            <a:ext cx="10911535" cy="3657600"/>
           </a:xfrm>
           <a:prstGeom prst="roundRect">
             <a:avLst>
@@ -9320,7 +9324,7 @@
         <p:spPr>
           <a:xfrm>
             <a:off x="868680" y="2103120"/>
-            <a:ext cx="10454335" cy="274320"/>
+            <a:ext cx="10454335" cy="400000"/>
           </a:xfrm>
           <a:prstGeom prst="rect">
             <a:avLst/>
@@ -9336,7 +9340,7 @@
               <a:buNone/>
             </a:pPr>
             <a:r>
-              <a:rPr lang="en-US" sz="1000" b="1" spc="200" kern="0" dirty="0">
+              <a:rPr lang="en-US" sz="1800" b="1" spc="200" kern="0" dirty="0">
                 <a:solidFill>
                   <a:srgbClr val="33459E"/>
                 </a:solidFill>
@@ -9346,7 +9350,7 @@
               </a:rPr>
               <a:t>NOTE</a:t>
             </a:r>
-            <a:endParaRPr lang="en-US" sz="1000" dirty="0"/>
+            <a:endParaRPr lang="en-US" sz="1800" dirty="0"/>
           </a:p>
         </p:txBody>
       </p:sp>
@@ -9358,24 +9362,24 @@
         </p:nvSpPr>
         <p:spPr>
           <a:xfrm>
-            <a:off x="868680" y="2404872"/>
-            <a:ext cx="10454335" cy="1051560"/>
-          </a:xfrm>
-          <a:prstGeom prst="rect">
-            <a:avLst/>
-          </a:prstGeom>
-          <a:noFill/>
-          <a:ln/>
-        </p:spPr>
-        <p:txBody>
-          <a:bodyPr wrap="square" lIns="0" tIns="0" rIns="0" bIns="0" rtlCol="0" anchor="t"/>
+            <a:off x="868680" y="2795960"/>
+            <a:ext cx="10454335" cy="2500000"/>
+          </a:xfrm>
+          <a:prstGeom prst="rect">
+            <a:avLst/>
+          </a:prstGeom>
+          <a:noFill/>
+          <a:ln/>
+        </p:spPr>
+        <p:txBody>
+          <a:bodyPr wrap="square" lIns="0" tIns="0" rIns="0" bIns="0" rtlCol="0" anchor="ctr"/>
           <a:lstStyle/>
           <a:p>
             <a:pPr indent="0" marL="0">
               <a:buNone/>
             </a:pPr>
             <a:r>
-              <a:rPr lang="en-US" sz="1250" dirty="0">
+              <a:rPr lang="en-US" sz="2800" dirty="0">
                 <a:solidFill>
                   <a:srgbClr val="26262F"/>
                 </a:solidFill>
@@ -9385,7 +9389,7 @@
               </a:rPr>
               <a:t>You could write a program with clean layers — a data layer, a business-logic layer, a presentation layer — and still run the entire thing on a single laptop as one process. That is one tier (everything deployed together) but multiple layers (well-organized code). Tiers and layers are independent design decisions.</a:t>
             </a:r>
-            <a:endParaRPr lang="en-US" sz="1250" dirty="0"/>
+            <a:endParaRPr lang="en-US" sz="2800" dirty="0"/>
           </a:p>
         </p:txBody>
       </p:sp>
@@ -9901,9 +9905,13 @@
             </a:avLst>
           </a:prstGeom>
           <a:solidFill>
-            <a:srgbClr val="1E1E4C"/>
+            <a:srgbClr val="F7F8F9"/>
           </a:solidFill>
-          <a:ln/>
+          <a:ln w="9525">
+            <a:solidFill>
+              <a:srgbClr val="D0D5DD"/>
+            </a:solidFill>
+          </a:ln>
         </p:spPr>
         <p:txBody>
           <a:bodyPr/>
@@ -9940,7 +9948,7 @@
             <a:r>
               <a:rPr lang="en-US" sz="1400" dirty="0">
                 <a:solidFill>
-                  <a:srgbClr val="C9D3F5"/>
+                  <a:srgbClr val="1F2429"/>
                 </a:solidFill>
                 <a:latin typeface="Courier New" pitchFamily="34" charset="0"/>
                 <a:ea typeface="Courier New" pitchFamily="34" charset="-122"/>
@@ -9960,7 +9968,7 @@
             <a:r>
               <a:rPr lang="en-US" sz="1400" dirty="0">
                 <a:solidFill>
-                  <a:srgbClr val="C9D3F5"/>
+                  <a:srgbClr val="1F2429"/>
                 </a:solidFill>
                 <a:latin typeface="Courier New" pitchFamily="34" charset="0"/>
                 <a:ea typeface="Courier New" pitchFamily="34" charset="-122"/>
@@ -9980,7 +9988,7 @@
             <a:r>
               <a:rPr lang="en-US" sz="1400" dirty="0">
                 <a:solidFill>
-                  <a:srgbClr val="C9D3F5"/>
+                  <a:srgbClr val="1F2429"/>
                 </a:solidFill>
                 <a:latin typeface="Courier New" pitchFamily="34" charset="0"/>
                 <a:ea typeface="Courier New" pitchFamily="34" charset="-122"/>
@@ -10000,7 +10008,7 @@
             <a:r>
               <a:rPr lang="en-US" sz="1400" dirty="0">
                 <a:solidFill>
-                  <a:srgbClr val="C9D3F5"/>
+                  <a:srgbClr val="1F2429"/>
                 </a:solidFill>
                 <a:latin typeface="Courier New" pitchFamily="34" charset="0"/>
                 <a:ea typeface="Courier New" pitchFamily="34" charset="-122"/>
